--- a/topic01-objects-and-classes/unit-1/talk-2-classes/classes.pptx
+++ b/topic01-objects-and-classes/unit-1/talk-2-classes/classes.pptx
@@ -2,7 +2,7 @@
 <file path=ppt/presentation.xml><?xml version="1.0" encoding="utf-8"?>
 <p:presentation xmlns:a="http://schemas.openxmlformats.org/drawingml/2006/main" xmlns:r="http://schemas.openxmlformats.org/officeDocument/2006/relationships" xmlns:p="http://schemas.openxmlformats.org/presentationml/2006/main" embedTrueTypeFonts="1">
   <p:sldMasterIdLst>
-    <p:sldMasterId id="2147483655" r:id="rId1"/>
+    <p:sldMasterId id="2147483669" r:id="rId1"/>
   </p:sldMasterIdLst>
   <p:notesMasterIdLst>
     <p:notesMasterId r:id="rId22"/>
@@ -33,20 +33,20 @@
   <p:notesSz cx="6858000" cy="9144000"/>
   <p:embeddedFontLst>
     <p:embeddedFont>
-      <p:font typeface="Courier" panose="020B0604020202020204" charset="0"/>
+      <p:font typeface="Courier" panose="02070309020205020404" pitchFamily="49" charset="0"/>
       <p:regular r:id="rId23"/>
       <p:bold r:id="rId24"/>
       <p:italic r:id="rId25"/>
       <p:boldItalic r:id="rId26"/>
     </p:embeddedFont>
     <p:embeddedFont>
-      <p:font typeface="Linux Biolinum" panose="020B0604020202020204" charset="0"/>
+      <p:font typeface="Linux Biolinum" panose="02000503000000000000" pitchFamily="2" charset="0"/>
       <p:regular r:id="rId27"/>
       <p:bold r:id="rId28"/>
       <p:italic r:id="rId29"/>
     </p:embeddedFont>
     <p:embeddedFont>
-      <p:font typeface="Tw Cen MT" panose="020B0602020104020603" pitchFamily="34" charset="0"/>
+      <p:font typeface="Tw Cen MT" panose="020B0602020104020603" pitchFamily="34" charset="77"/>
       <p:regular r:id="rId30"/>
       <p:bold r:id="rId31"/>
       <p:italic r:id="rId32"/>
@@ -57,7 +57,7 @@
     <a:defPPr>
       <a:defRPr lang="en-US"/>
     </a:defPPr>
-    <a:lvl1pPr marL="0" algn="l" defTabSz="457200" rtl="0" eaLnBrk="1" latinLnBrk="0" hangingPunct="1">
+    <a:lvl1pPr marL="0" algn="l" defTabSz="914400" rtl="0" eaLnBrk="1" latinLnBrk="0" hangingPunct="1">
       <a:defRPr sz="1800" kern="1200">
         <a:solidFill>
           <a:schemeClr val="tx1"/>
@@ -67,7 +67,7 @@
         <a:cs typeface="+mn-cs"/>
       </a:defRPr>
     </a:lvl1pPr>
-    <a:lvl2pPr marL="457200" algn="l" defTabSz="457200" rtl="0" eaLnBrk="1" latinLnBrk="0" hangingPunct="1">
+    <a:lvl2pPr marL="457200" algn="l" defTabSz="914400" rtl="0" eaLnBrk="1" latinLnBrk="0" hangingPunct="1">
       <a:defRPr sz="1800" kern="1200">
         <a:solidFill>
           <a:schemeClr val="tx1"/>
@@ -77,7 +77,7 @@
         <a:cs typeface="+mn-cs"/>
       </a:defRPr>
     </a:lvl2pPr>
-    <a:lvl3pPr marL="914400" algn="l" defTabSz="457200" rtl="0" eaLnBrk="1" latinLnBrk="0" hangingPunct="1">
+    <a:lvl3pPr marL="914400" algn="l" defTabSz="914400" rtl="0" eaLnBrk="1" latinLnBrk="0" hangingPunct="1">
       <a:defRPr sz="1800" kern="1200">
         <a:solidFill>
           <a:schemeClr val="tx1"/>
@@ -87,7 +87,7 @@
         <a:cs typeface="+mn-cs"/>
       </a:defRPr>
     </a:lvl3pPr>
-    <a:lvl4pPr marL="1371600" algn="l" defTabSz="457200" rtl="0" eaLnBrk="1" latinLnBrk="0" hangingPunct="1">
+    <a:lvl4pPr marL="1371600" algn="l" defTabSz="914400" rtl="0" eaLnBrk="1" latinLnBrk="0" hangingPunct="1">
       <a:defRPr sz="1800" kern="1200">
         <a:solidFill>
           <a:schemeClr val="tx1"/>
@@ -97,7 +97,7 @@
         <a:cs typeface="+mn-cs"/>
       </a:defRPr>
     </a:lvl4pPr>
-    <a:lvl5pPr marL="1828800" algn="l" defTabSz="457200" rtl="0" eaLnBrk="1" latinLnBrk="0" hangingPunct="1">
+    <a:lvl5pPr marL="1828800" algn="l" defTabSz="914400" rtl="0" eaLnBrk="1" latinLnBrk="0" hangingPunct="1">
       <a:defRPr sz="1800" kern="1200">
         <a:solidFill>
           <a:schemeClr val="tx1"/>
@@ -107,7 +107,7 @@
         <a:cs typeface="+mn-cs"/>
       </a:defRPr>
     </a:lvl5pPr>
-    <a:lvl6pPr marL="2286000" algn="l" defTabSz="457200" rtl="0" eaLnBrk="1" latinLnBrk="0" hangingPunct="1">
+    <a:lvl6pPr marL="2286000" algn="l" defTabSz="914400" rtl="0" eaLnBrk="1" latinLnBrk="0" hangingPunct="1">
       <a:defRPr sz="1800" kern="1200">
         <a:solidFill>
           <a:schemeClr val="tx1"/>
@@ -117,7 +117,7 @@
         <a:cs typeface="+mn-cs"/>
       </a:defRPr>
     </a:lvl6pPr>
-    <a:lvl7pPr marL="2743200" algn="l" defTabSz="457200" rtl="0" eaLnBrk="1" latinLnBrk="0" hangingPunct="1">
+    <a:lvl7pPr marL="2743200" algn="l" defTabSz="914400" rtl="0" eaLnBrk="1" latinLnBrk="0" hangingPunct="1">
       <a:defRPr sz="1800" kern="1200">
         <a:solidFill>
           <a:schemeClr val="tx1"/>
@@ -127,7 +127,7 @@
         <a:cs typeface="+mn-cs"/>
       </a:defRPr>
     </a:lvl7pPr>
-    <a:lvl8pPr marL="3200400" algn="l" defTabSz="457200" rtl="0" eaLnBrk="1" latinLnBrk="0" hangingPunct="1">
+    <a:lvl8pPr marL="3200400" algn="l" defTabSz="914400" rtl="0" eaLnBrk="1" latinLnBrk="0" hangingPunct="1">
       <a:defRPr sz="1800" kern="1200">
         <a:solidFill>
           <a:schemeClr val="tx1"/>
@@ -137,7 +137,7 @@
         <a:cs typeface="+mn-cs"/>
       </a:defRPr>
     </a:lvl8pPr>
-    <a:lvl9pPr marL="3657600" algn="l" defTabSz="457200" rtl="0" eaLnBrk="1" latinLnBrk="0" hangingPunct="1">
+    <a:lvl9pPr marL="3657600" algn="l" defTabSz="914400" rtl="0" eaLnBrk="1" latinLnBrk="0" hangingPunct="1">
       <a:defRPr sz="1800" kern="1200">
         <a:solidFill>
           <a:schemeClr val="tx1"/>
@@ -368,20 +368,16 @@
         </p:nvSpPr>
         <p:spPr>
           <a:xfrm>
-            <a:off x="1524000" y="1122363"/>
-            <a:ext cx="9144000" cy="2387600"/>
+            <a:off x="914400" y="2130426"/>
+            <a:ext cx="10363200" cy="1470025"/>
           </a:xfrm>
         </p:spPr>
         <p:txBody>
-          <a:bodyPr anchor="b"/>
-          <a:lstStyle>
-            <a:lvl1pPr algn="ctr">
-              <a:defRPr sz="6000"/>
-            </a:lvl1pPr>
-          </a:lstStyle>
-          <a:p>
-            <a:r>
-              <a:rPr lang="en-US"/>
+          <a:bodyPr/>
+          <a:lstStyle/>
+          <a:p>
+            <a:r>
+              <a:rPr lang="en-GB"/>
               <a:t>Click to edit Master title style</a:t>
             </a:r>
             <a:endParaRPr lang="en-US" dirty="0"/>
@@ -400,8 +396,8 @@
         </p:nvSpPr>
         <p:spPr>
           <a:xfrm>
-            <a:off x="1524000" y="3602038"/>
-            <a:ext cx="9144000" cy="1655762"/>
+            <a:off x="1828800" y="3886200"/>
+            <a:ext cx="8534400" cy="1752600"/>
           </a:xfrm>
         </p:spPr>
         <p:txBody>
@@ -409,44 +405,98 @@
           <a:lstStyle>
             <a:lvl1pPr marL="0" indent="0" algn="ctr">
               <a:buNone/>
-              <a:defRPr sz="2400"/>
+              <a:defRPr>
+                <a:solidFill>
+                  <a:schemeClr val="tx1">
+                    <a:tint val="75000"/>
+                  </a:schemeClr>
+                </a:solidFill>
+              </a:defRPr>
             </a:lvl1pPr>
             <a:lvl2pPr marL="457200" indent="0" algn="ctr">
               <a:buNone/>
-              <a:defRPr sz="2000"/>
+              <a:defRPr>
+                <a:solidFill>
+                  <a:schemeClr val="tx1">
+                    <a:tint val="75000"/>
+                  </a:schemeClr>
+                </a:solidFill>
+              </a:defRPr>
             </a:lvl2pPr>
             <a:lvl3pPr marL="914400" indent="0" algn="ctr">
               <a:buNone/>
-              <a:defRPr sz="1800"/>
+              <a:defRPr>
+                <a:solidFill>
+                  <a:schemeClr val="tx1">
+                    <a:tint val="75000"/>
+                  </a:schemeClr>
+                </a:solidFill>
+              </a:defRPr>
             </a:lvl3pPr>
             <a:lvl4pPr marL="1371600" indent="0" algn="ctr">
               <a:buNone/>
-              <a:defRPr sz="1600"/>
+              <a:defRPr>
+                <a:solidFill>
+                  <a:schemeClr val="tx1">
+                    <a:tint val="75000"/>
+                  </a:schemeClr>
+                </a:solidFill>
+              </a:defRPr>
             </a:lvl4pPr>
             <a:lvl5pPr marL="1828800" indent="0" algn="ctr">
               <a:buNone/>
-              <a:defRPr sz="1600"/>
+              <a:defRPr>
+                <a:solidFill>
+                  <a:schemeClr val="tx1">
+                    <a:tint val="75000"/>
+                  </a:schemeClr>
+                </a:solidFill>
+              </a:defRPr>
             </a:lvl5pPr>
             <a:lvl6pPr marL="2286000" indent="0" algn="ctr">
               <a:buNone/>
-              <a:defRPr sz="1600"/>
+              <a:defRPr>
+                <a:solidFill>
+                  <a:schemeClr val="tx1">
+                    <a:tint val="75000"/>
+                  </a:schemeClr>
+                </a:solidFill>
+              </a:defRPr>
             </a:lvl6pPr>
             <a:lvl7pPr marL="2743200" indent="0" algn="ctr">
               <a:buNone/>
-              <a:defRPr sz="1600"/>
+              <a:defRPr>
+                <a:solidFill>
+                  <a:schemeClr val="tx1">
+                    <a:tint val="75000"/>
+                  </a:schemeClr>
+                </a:solidFill>
+              </a:defRPr>
             </a:lvl7pPr>
             <a:lvl8pPr marL="3200400" indent="0" algn="ctr">
               <a:buNone/>
-              <a:defRPr sz="1600"/>
+              <a:defRPr>
+                <a:solidFill>
+                  <a:schemeClr val="tx1">
+                    <a:tint val="75000"/>
+                  </a:schemeClr>
+                </a:solidFill>
+              </a:defRPr>
             </a:lvl8pPr>
             <a:lvl9pPr marL="3657600" indent="0" algn="ctr">
               <a:buNone/>
-              <a:defRPr sz="1600"/>
+              <a:defRPr>
+                <a:solidFill>
+                  <a:schemeClr val="tx1">
+                    <a:tint val="75000"/>
+                  </a:schemeClr>
+                </a:solidFill>
+              </a:defRPr>
             </a:lvl9pPr>
           </a:lstStyle>
           <a:p>
             <a:r>
-              <a:rPr lang="en-US"/>
+              <a:rPr lang="en-GB"/>
               <a:t>Click to edit Master subtitle style</a:t>
             </a:r>
             <a:endParaRPr lang="en-US" dirty="0"/>
@@ -469,8 +519,8 @@
           <a:lstStyle/>
           <a:p>
             <a:fld id="{C764DE79-268F-4C1A-8933-263129D2AF90}" type="datetimeFigureOut">
-              <a:rPr lang="en-US" dirty="0"/>
-              <a:t>9/12/2025</a:t>
+              <a:rPr lang="en-US" smtClean="0"/>
+              <a:t>9/14/25</a:t>
             </a:fld>
             <a:endParaRPr lang="en-US" dirty="0"/>
           </a:p>
@@ -521,7 +571,7 @@
     </p:spTree>
     <p:extLst>
       <p:ext uri="{BB962C8B-B14F-4D97-AF65-F5344CB8AC3E}">
-        <p14:creationId xmlns:p14="http://schemas.microsoft.com/office/powerpoint/2010/main" val="4153408225"/>
+        <p14:creationId xmlns:p14="http://schemas.microsoft.com/office/powerpoint/2010/main" val="2714845697"/>
       </p:ext>
     </p:extLst>
   </p:cSld>
@@ -564,10 +614,10 @@
           <a:lstStyle/>
           <a:p>
             <a:r>
-              <a:rPr lang="en-US"/>
+              <a:rPr lang="en-GB"/>
               <a:t>Click to edit Master title style</a:t>
             </a:r>
-            <a:endParaRPr lang="en-US" dirty="0"/>
+            <a:endParaRPr lang="en-US"/>
           </a:p>
         </p:txBody>
       </p:sp>
@@ -588,38 +638,38 @@
           <a:p>
             <a:pPr lvl="0"/>
             <a:r>
-              <a:rPr lang="en-US"/>
+              <a:rPr lang="en-GB"/>
               <a:t>Click to edit Master text styles</a:t>
             </a:r>
           </a:p>
           <a:p>
             <a:pPr lvl="1"/>
             <a:r>
-              <a:rPr lang="en-US"/>
+              <a:rPr lang="en-GB"/>
               <a:t>Second level</a:t>
             </a:r>
           </a:p>
           <a:p>
             <a:pPr lvl="2"/>
             <a:r>
-              <a:rPr lang="en-US"/>
+              <a:rPr lang="en-GB"/>
               <a:t>Third level</a:t>
             </a:r>
           </a:p>
           <a:p>
             <a:pPr lvl="3"/>
             <a:r>
-              <a:rPr lang="en-US"/>
+              <a:rPr lang="en-GB"/>
               <a:t>Fourth level</a:t>
             </a:r>
           </a:p>
           <a:p>
             <a:pPr lvl="4"/>
             <a:r>
-              <a:rPr lang="en-US"/>
+              <a:rPr lang="en-GB"/>
               <a:t>Fifth level</a:t>
             </a:r>
-            <a:endParaRPr lang="en-US" dirty="0"/>
+            <a:endParaRPr lang="en-US"/>
           </a:p>
         </p:txBody>
       </p:sp>
@@ -639,8 +689,8 @@
           <a:lstStyle/>
           <a:p>
             <a:fld id="{C764DE79-268F-4C1A-8933-263129D2AF90}" type="datetimeFigureOut">
-              <a:rPr lang="en-US" dirty="0"/>
-              <a:t>9/12/2025</a:t>
+              <a:rPr lang="en-US" smtClean="0"/>
+              <a:t>9/14/25</a:t>
             </a:fld>
             <a:endParaRPr lang="en-US" dirty="0"/>
           </a:p>
@@ -691,7 +741,7 @@
     </p:spTree>
     <p:extLst>
       <p:ext uri="{BB962C8B-B14F-4D97-AF65-F5344CB8AC3E}">
-        <p14:creationId xmlns:p14="http://schemas.microsoft.com/office/powerpoint/2010/main" val="675742296"/>
+        <p14:creationId xmlns:p14="http://schemas.microsoft.com/office/powerpoint/2010/main" val="1749145542"/>
       </p:ext>
     </p:extLst>
   </p:cSld>
@@ -730,8 +780,8 @@
         </p:nvSpPr>
         <p:spPr>
           <a:xfrm>
-            <a:off x="8724900" y="365125"/>
-            <a:ext cx="2628900" cy="5811838"/>
+            <a:off x="8839200" y="274639"/>
+            <a:ext cx="2743200" cy="5851525"/>
           </a:xfrm>
         </p:spPr>
         <p:txBody>
@@ -739,10 +789,10 @@
           <a:lstStyle/>
           <a:p>
             <a:r>
-              <a:rPr lang="en-US"/>
+              <a:rPr lang="en-GB"/>
               <a:t>Click to edit Master title style</a:t>
             </a:r>
-            <a:endParaRPr lang="en-US" dirty="0"/>
+            <a:endParaRPr lang="en-US"/>
           </a:p>
         </p:txBody>
       </p:sp>
@@ -758,8 +808,8 @@
         </p:nvSpPr>
         <p:spPr>
           <a:xfrm>
-            <a:off x="838200" y="365125"/>
-            <a:ext cx="7734300" cy="5811838"/>
+            <a:off x="609600" y="274639"/>
+            <a:ext cx="8026400" cy="5851525"/>
           </a:xfrm>
         </p:spPr>
         <p:txBody>
@@ -768,38 +818,38 @@
           <a:p>
             <a:pPr lvl="0"/>
             <a:r>
-              <a:rPr lang="en-US"/>
+              <a:rPr lang="en-GB"/>
               <a:t>Click to edit Master text styles</a:t>
             </a:r>
           </a:p>
           <a:p>
             <a:pPr lvl="1"/>
             <a:r>
-              <a:rPr lang="en-US"/>
+              <a:rPr lang="en-GB"/>
               <a:t>Second level</a:t>
             </a:r>
           </a:p>
           <a:p>
             <a:pPr lvl="2"/>
             <a:r>
-              <a:rPr lang="en-US"/>
+              <a:rPr lang="en-GB"/>
               <a:t>Third level</a:t>
             </a:r>
           </a:p>
           <a:p>
             <a:pPr lvl="3"/>
             <a:r>
-              <a:rPr lang="en-US"/>
+              <a:rPr lang="en-GB"/>
               <a:t>Fourth level</a:t>
             </a:r>
           </a:p>
           <a:p>
             <a:pPr lvl="4"/>
             <a:r>
-              <a:rPr lang="en-US"/>
+              <a:rPr lang="en-GB"/>
               <a:t>Fifth level</a:t>
             </a:r>
-            <a:endParaRPr lang="en-US" dirty="0"/>
+            <a:endParaRPr lang="en-US"/>
           </a:p>
         </p:txBody>
       </p:sp>
@@ -819,8 +869,8 @@
           <a:lstStyle/>
           <a:p>
             <a:fld id="{C764DE79-268F-4C1A-8933-263129D2AF90}" type="datetimeFigureOut">
-              <a:rPr lang="en-US" dirty="0"/>
-              <a:t>9/12/2025</a:t>
+              <a:rPr lang="en-US" smtClean="0"/>
+              <a:t>9/14/25</a:t>
             </a:fld>
             <a:endParaRPr lang="en-US" dirty="0"/>
           </a:p>
@@ -871,7 +921,7 @@
     </p:spTree>
     <p:extLst>
       <p:ext uri="{BB962C8B-B14F-4D97-AF65-F5344CB8AC3E}">
-        <p14:creationId xmlns:p14="http://schemas.microsoft.com/office/powerpoint/2010/main" val="249381890"/>
+        <p14:creationId xmlns:p14="http://schemas.microsoft.com/office/powerpoint/2010/main" val="1539280574"/>
       </p:ext>
     </p:extLst>
   </p:cSld>
@@ -882,6 +932,146 @@
 </file>
 
 <file path=ppt/slideLayouts/slideLayout12.xml><?xml version="1.0" encoding="utf-8"?>
+<p:sldLayout xmlns:a="http://schemas.openxmlformats.org/drawingml/2006/main" xmlns:r="http://schemas.openxmlformats.org/officeDocument/2006/relationships" xmlns:p="http://schemas.openxmlformats.org/presentationml/2006/main" type="tx">
+  <p:cSld name="Title &amp; Bullets">
+    <p:spTree>
+      <p:nvGrpSpPr>
+        <p:cNvPr id="1" name=""/>
+        <p:cNvGrpSpPr/>
+        <p:nvPr/>
+      </p:nvGrpSpPr>
+      <p:grpSpPr>
+        <a:xfrm>
+          <a:off x="0" y="0"/>
+          <a:ext cx="0" cy="0"/>
+          <a:chOff x="0" y="0"/>
+          <a:chExt cx="0" cy="0"/>
+        </a:xfrm>
+      </p:grpSpPr>
+      <p:sp>
+        <p:nvSpPr>
+          <p:cNvPr id="22" name="Shape 22"/>
+          <p:cNvSpPr>
+            <a:spLocks noGrp="1"/>
+          </p:cNvSpPr>
+          <p:nvPr>
+            <p:ph type="title"/>
+          </p:nvPr>
+        </p:nvSpPr>
+        <p:spPr>
+          <a:prstGeom prst="rect">
+            <a:avLst/>
+          </a:prstGeom>
+        </p:spPr>
+        <p:txBody>
+          <a:bodyPr/>
+          <a:lstStyle/>
+          <a:p>
+            <a:r>
+              <a:rPr lang="en-GB"/>
+              <a:t>Click to edit Master title style</a:t>
+            </a:r>
+            <a:endParaRPr/>
+          </a:p>
+        </p:txBody>
+      </p:sp>
+      <p:sp>
+        <p:nvSpPr>
+          <p:cNvPr id="23" name="Shape 23"/>
+          <p:cNvSpPr>
+            <a:spLocks noGrp="1"/>
+          </p:cNvSpPr>
+          <p:nvPr>
+            <p:ph type="body" idx="1"/>
+          </p:nvPr>
+        </p:nvSpPr>
+        <p:spPr>
+          <a:prstGeom prst="rect">
+            <a:avLst/>
+          </a:prstGeom>
+        </p:spPr>
+        <p:txBody>
+          <a:bodyPr/>
+          <a:lstStyle/>
+          <a:p>
+            <a:pPr lvl="0"/>
+            <a:r>
+              <a:rPr lang="en-GB"/>
+              <a:t>Click to edit Master text styles</a:t>
+            </a:r>
+          </a:p>
+          <a:p>
+            <a:pPr lvl="1"/>
+            <a:r>
+              <a:rPr lang="en-GB"/>
+              <a:t>Second level</a:t>
+            </a:r>
+          </a:p>
+          <a:p>
+            <a:pPr lvl="2"/>
+            <a:r>
+              <a:rPr lang="en-GB"/>
+              <a:t>Third level</a:t>
+            </a:r>
+          </a:p>
+          <a:p>
+            <a:pPr lvl="3"/>
+            <a:r>
+              <a:rPr lang="en-GB"/>
+              <a:t>Fourth level</a:t>
+            </a:r>
+          </a:p>
+          <a:p>
+            <a:pPr lvl="4"/>
+            <a:r>
+              <a:rPr lang="en-GB"/>
+              <a:t>Fifth level</a:t>
+            </a:r>
+            <a:endParaRPr/>
+          </a:p>
+        </p:txBody>
+      </p:sp>
+      <p:sp>
+        <p:nvSpPr>
+          <p:cNvPr id="24" name="Shape 24"/>
+          <p:cNvSpPr>
+            <a:spLocks noGrp="1"/>
+          </p:cNvSpPr>
+          <p:nvPr>
+            <p:ph type="sldNum" sz="quarter" idx="2"/>
+          </p:nvPr>
+        </p:nvSpPr>
+        <p:spPr>
+          <a:prstGeom prst="rect">
+            <a:avLst/>
+          </a:prstGeom>
+        </p:spPr>
+        <p:txBody>
+          <a:bodyPr/>
+          <a:lstStyle/>
+          <a:p>
+            <a:fld id="{86CB4B4D-7CA3-9044-876B-883B54F8677D}" type="slidenum">
+              <a:rPr lang="en-IE" smtClean="0"/>
+              <a:t>‹#›</a:t>
+            </a:fld>
+            <a:endParaRPr lang="en-IE"/>
+          </a:p>
+        </p:txBody>
+      </p:sp>
+    </p:spTree>
+    <p:extLst>
+      <p:ext uri="{BB962C8B-B14F-4D97-AF65-F5344CB8AC3E}">
+        <p14:creationId xmlns:p14="http://schemas.microsoft.com/office/powerpoint/2010/main" val="2786045232"/>
+      </p:ext>
+    </p:extLst>
+  </p:cSld>
+  <p:clrMapOvr>
+    <a:masterClrMapping/>
+  </p:clrMapOvr>
+</p:sldLayout>
+</file>
+
+<file path=ppt/slideLayouts/slideLayout13.xml><?xml version="1.0" encoding="utf-8"?>
 <p:sldLayout xmlns:a="http://schemas.openxmlformats.org/drawingml/2006/main" xmlns:r="http://schemas.openxmlformats.org/officeDocument/2006/relationships" xmlns:p="http://schemas.openxmlformats.org/presentationml/2006/main" type="tx">
   <p:cSld name="Title and Box">
     <p:spTree>
@@ -960,7 +1150,7 @@
     </p:spTree>
     <p:extLst>
       <p:ext uri="{BB962C8B-B14F-4D97-AF65-F5344CB8AC3E}">
-        <p14:creationId xmlns:p14="http://schemas.microsoft.com/office/powerpoint/2010/main" val="288811658"/>
+        <p14:creationId xmlns:p14="http://schemas.microsoft.com/office/powerpoint/2010/main" val="1105144671"/>
       </p:ext>
     </p:extLst>
   </p:cSld>
@@ -1001,10 +1191,21 @@
         <p:spPr/>
         <p:txBody>
           <a:bodyPr/>
-          <a:lstStyle/>
-          <a:p>
-            <a:r>
-              <a:rPr lang="en-US"/>
+          <a:lstStyle>
+            <a:lvl1pPr algn="l">
+              <a:defRPr>
+                <a:solidFill>
+                  <a:schemeClr val="tx1">
+                    <a:lumMod val="65000"/>
+                    <a:lumOff val="35000"/>
+                  </a:schemeClr>
+                </a:solidFill>
+              </a:defRPr>
+            </a:lvl1pPr>
+          </a:lstStyle>
+          <a:p>
+            <a:r>
+              <a:rPr lang="en-GB"/>
               <a:t>Click to edit Master title style</a:t>
             </a:r>
             <a:endParaRPr lang="en-US" dirty="0"/>
@@ -1028,38 +1229,38 @@
           <a:p>
             <a:pPr lvl="0"/>
             <a:r>
-              <a:rPr lang="en-US"/>
+              <a:rPr lang="en-GB"/>
               <a:t>Click to edit Master text styles</a:t>
             </a:r>
           </a:p>
           <a:p>
             <a:pPr lvl="1"/>
             <a:r>
-              <a:rPr lang="en-US"/>
+              <a:rPr lang="en-GB"/>
               <a:t>Second level</a:t>
             </a:r>
           </a:p>
           <a:p>
             <a:pPr lvl="2"/>
             <a:r>
-              <a:rPr lang="en-US"/>
+              <a:rPr lang="en-GB"/>
               <a:t>Third level</a:t>
             </a:r>
           </a:p>
           <a:p>
             <a:pPr lvl="3"/>
             <a:r>
-              <a:rPr lang="en-US"/>
+              <a:rPr lang="en-GB"/>
               <a:t>Fourth level</a:t>
             </a:r>
           </a:p>
           <a:p>
             <a:pPr lvl="4"/>
             <a:r>
-              <a:rPr lang="en-US"/>
+              <a:rPr lang="en-GB"/>
               <a:t>Fifth level</a:t>
             </a:r>
-            <a:endParaRPr lang="en-US" dirty="0"/>
+            <a:endParaRPr lang="en-US"/>
           </a:p>
         </p:txBody>
       </p:sp>
@@ -1079,8 +1280,8 @@
           <a:lstStyle/>
           <a:p>
             <a:fld id="{C764DE79-268F-4C1A-8933-263129D2AF90}" type="datetimeFigureOut">
-              <a:rPr lang="en-US" dirty="0"/>
-              <a:t>9/12/2025</a:t>
+              <a:rPr lang="en-US" smtClean="0"/>
+              <a:t>9/14/25</a:t>
             </a:fld>
             <a:endParaRPr lang="en-US" dirty="0"/>
           </a:p>
@@ -1128,10 +1329,92 @@
           </a:p>
         </p:txBody>
       </p:sp>
+      <p:cxnSp>
+        <p:nvCxnSpPr>
+          <p:cNvPr id="7" name="Straight Connector 6"/>
+          <p:cNvCxnSpPr/>
+          <p:nvPr/>
+        </p:nvCxnSpPr>
+        <p:spPr>
+          <a:xfrm>
+            <a:off x="609600" y="1447800"/>
+            <a:ext cx="11074400" cy="0"/>
+          </a:xfrm>
+          <a:prstGeom prst="line">
+            <a:avLst/>
+          </a:prstGeom>
+          <a:ln w="12700">
+            <a:solidFill>
+              <a:schemeClr val="tx1">
+                <a:lumMod val="50000"/>
+                <a:lumOff val="50000"/>
+              </a:schemeClr>
+            </a:solidFill>
+          </a:ln>
+        </p:spPr>
+        <p:style>
+          <a:lnRef idx="1">
+            <a:schemeClr val="accent1"/>
+          </a:lnRef>
+          <a:fillRef idx="0">
+            <a:schemeClr val="accent1"/>
+          </a:fillRef>
+          <a:effectRef idx="0">
+            <a:schemeClr val="accent1"/>
+          </a:effectRef>
+          <a:fontRef idx="minor">
+            <a:schemeClr val="tx1"/>
+          </a:fontRef>
+        </p:style>
+      </p:cxnSp>
+      <p:cxnSp>
+        <p:nvCxnSpPr>
+          <p:cNvPr id="8" name="Straight Connector 7">
+            <a:extLst>
+              <a:ext uri="{FF2B5EF4-FFF2-40B4-BE49-F238E27FC236}">
+                <a16:creationId xmlns:a16="http://schemas.microsoft.com/office/drawing/2014/main" id="{A54FA624-7CFC-3CFB-8384-E3FA99B20E94}"/>
+              </a:ext>
+            </a:extLst>
+          </p:cNvPr>
+          <p:cNvCxnSpPr/>
+          <p:nvPr/>
+        </p:nvCxnSpPr>
+        <p:spPr>
+          <a:xfrm>
+            <a:off x="609600" y="1447800"/>
+            <a:ext cx="11074400" cy="0"/>
+          </a:xfrm>
+          <a:prstGeom prst="line">
+            <a:avLst/>
+          </a:prstGeom>
+          <a:ln w="12700">
+            <a:solidFill>
+              <a:schemeClr val="tx1">
+                <a:lumMod val="50000"/>
+                <a:lumOff val="50000"/>
+              </a:schemeClr>
+            </a:solidFill>
+          </a:ln>
+        </p:spPr>
+        <p:style>
+          <a:lnRef idx="1">
+            <a:schemeClr val="accent1"/>
+          </a:lnRef>
+          <a:fillRef idx="0">
+            <a:schemeClr val="accent1"/>
+          </a:fillRef>
+          <a:effectRef idx="0">
+            <a:schemeClr val="accent1"/>
+          </a:effectRef>
+          <a:fontRef idx="minor">
+            <a:schemeClr val="tx1"/>
+          </a:fontRef>
+        </p:style>
+      </p:cxnSp>
     </p:spTree>
     <p:extLst>
       <p:ext uri="{BB962C8B-B14F-4D97-AF65-F5344CB8AC3E}">
-        <p14:creationId xmlns:p14="http://schemas.microsoft.com/office/powerpoint/2010/main" val="1729940431"/>
+        <p14:creationId xmlns:p14="http://schemas.microsoft.com/office/powerpoint/2010/main" val="746999740"/>
       </p:ext>
     </p:extLst>
   </p:cSld>
@@ -1170,23 +1453,23 @@
         </p:nvSpPr>
         <p:spPr>
           <a:xfrm>
-            <a:off x="831850" y="1709738"/>
-            <a:ext cx="10515600" cy="2852737"/>
+            <a:off x="963084" y="4406901"/>
+            <a:ext cx="10363200" cy="1362075"/>
           </a:xfrm>
         </p:spPr>
         <p:txBody>
-          <a:bodyPr anchor="b"/>
+          <a:bodyPr anchor="t"/>
           <a:lstStyle>
-            <a:lvl1pPr>
-              <a:defRPr sz="6000"/>
+            <a:lvl1pPr algn="l">
+              <a:defRPr sz="4000" b="1" cap="all"/>
             </a:lvl1pPr>
           </a:lstStyle>
           <a:p>
             <a:r>
-              <a:rPr lang="en-US"/>
+              <a:rPr lang="en-GB"/>
               <a:t>Click to edit Master title style</a:t>
             </a:r>
-            <a:endParaRPr lang="en-US" dirty="0"/>
+            <a:endParaRPr lang="en-US"/>
           </a:p>
         </p:txBody>
       </p:sp>
@@ -1202,16 +1485,16 @@
         </p:nvSpPr>
         <p:spPr>
           <a:xfrm>
-            <a:off x="831850" y="4589463"/>
-            <a:ext cx="10515600" cy="1500187"/>
+            <a:off x="963084" y="2906713"/>
+            <a:ext cx="10363200" cy="1500187"/>
           </a:xfrm>
         </p:spPr>
         <p:txBody>
-          <a:bodyPr/>
+          <a:bodyPr anchor="b"/>
           <a:lstStyle>
             <a:lvl1pPr marL="0" indent="0">
               <a:buNone/>
-              <a:defRPr sz="2400">
+              <a:defRPr sz="2000">
                 <a:solidFill>
                   <a:schemeClr val="tx1">
                     <a:tint val="75000"/>
@@ -1221,7 +1504,7 @@
             </a:lvl1pPr>
             <a:lvl2pPr marL="457200" indent="0">
               <a:buNone/>
-              <a:defRPr sz="2000">
+              <a:defRPr sz="1800">
                 <a:solidFill>
                   <a:schemeClr val="tx1">
                     <a:tint val="75000"/>
@@ -1231,7 +1514,7 @@
             </a:lvl2pPr>
             <a:lvl3pPr marL="914400" indent="0">
               <a:buNone/>
-              <a:defRPr sz="1800">
+              <a:defRPr sz="1600">
                 <a:solidFill>
                   <a:schemeClr val="tx1">
                     <a:tint val="75000"/>
@@ -1241,7 +1524,7 @@
             </a:lvl3pPr>
             <a:lvl4pPr marL="1371600" indent="0">
               <a:buNone/>
-              <a:defRPr sz="1600">
+              <a:defRPr sz="1400">
                 <a:solidFill>
                   <a:schemeClr val="tx1">
                     <a:tint val="75000"/>
@@ -1251,7 +1534,7 @@
             </a:lvl4pPr>
             <a:lvl5pPr marL="1828800" indent="0">
               <a:buNone/>
-              <a:defRPr sz="1600">
+              <a:defRPr sz="1400">
                 <a:solidFill>
                   <a:schemeClr val="tx1">
                     <a:tint val="75000"/>
@@ -1261,7 +1544,7 @@
             </a:lvl5pPr>
             <a:lvl6pPr marL="2286000" indent="0">
               <a:buNone/>
-              <a:defRPr sz="1600">
+              <a:defRPr sz="1400">
                 <a:solidFill>
                   <a:schemeClr val="tx1">
                     <a:tint val="75000"/>
@@ -1271,7 +1554,7 @@
             </a:lvl6pPr>
             <a:lvl7pPr marL="2743200" indent="0">
               <a:buNone/>
-              <a:defRPr sz="1600">
+              <a:defRPr sz="1400">
                 <a:solidFill>
                   <a:schemeClr val="tx1">
                     <a:tint val="75000"/>
@@ -1281,7 +1564,7 @@
             </a:lvl7pPr>
             <a:lvl8pPr marL="3200400" indent="0">
               <a:buNone/>
-              <a:defRPr sz="1600">
+              <a:defRPr sz="1400">
                 <a:solidFill>
                   <a:schemeClr val="tx1">
                     <a:tint val="75000"/>
@@ -1291,7 +1574,7 @@
             </a:lvl8pPr>
             <a:lvl9pPr marL="3657600" indent="0">
               <a:buNone/>
-              <a:defRPr sz="1600">
+              <a:defRPr sz="1400">
                 <a:solidFill>
                   <a:schemeClr val="tx1">
                     <a:tint val="75000"/>
@@ -1303,7 +1586,7 @@
           <a:p>
             <a:pPr lvl="0"/>
             <a:r>
-              <a:rPr lang="en-US"/>
+              <a:rPr lang="en-GB"/>
               <a:t>Click to edit Master text styles</a:t>
             </a:r>
           </a:p>
@@ -1325,8 +1608,8 @@
           <a:lstStyle/>
           <a:p>
             <a:fld id="{C764DE79-268F-4C1A-8933-263129D2AF90}" type="datetimeFigureOut">
-              <a:rPr lang="en-US" dirty="0"/>
-              <a:t>9/12/2025</a:t>
+              <a:rPr lang="en-US" smtClean="0"/>
+              <a:t>9/14/25</a:t>
             </a:fld>
             <a:endParaRPr lang="en-US" dirty="0"/>
           </a:p>
@@ -1377,7 +1660,7 @@
     </p:spTree>
     <p:extLst>
       <p:ext uri="{BB962C8B-B14F-4D97-AF65-F5344CB8AC3E}">
-        <p14:creationId xmlns:p14="http://schemas.microsoft.com/office/powerpoint/2010/main" val="382816369"/>
+        <p14:creationId xmlns:p14="http://schemas.microsoft.com/office/powerpoint/2010/main" val="3995787759"/>
       </p:ext>
     </p:extLst>
   </p:cSld>
@@ -1417,10 +1700,21 @@
         <p:spPr/>
         <p:txBody>
           <a:bodyPr/>
-          <a:lstStyle/>
-          <a:p>
-            <a:r>
-              <a:rPr lang="en-US"/>
+          <a:lstStyle>
+            <a:lvl1pPr algn="l">
+              <a:defRPr>
+                <a:solidFill>
+                  <a:schemeClr val="tx1">
+                    <a:lumMod val="65000"/>
+                    <a:lumOff val="35000"/>
+                  </a:schemeClr>
+                </a:solidFill>
+              </a:defRPr>
+            </a:lvl1pPr>
+          </a:lstStyle>
+          <a:p>
+            <a:r>
+              <a:rPr lang="en-GB"/>
               <a:t>Click to edit Master title style</a:t>
             </a:r>
             <a:endParaRPr lang="en-US" dirty="0"/>
@@ -1439,48 +1733,76 @@
         </p:nvSpPr>
         <p:spPr>
           <a:xfrm>
-            <a:off x="838200" y="1825625"/>
-            <a:ext cx="5181600" cy="4351338"/>
+            <a:off x="609600" y="1600201"/>
+            <a:ext cx="5384800" cy="4525963"/>
           </a:xfrm>
         </p:spPr>
         <p:txBody>
           <a:bodyPr/>
-          <a:lstStyle/>
+          <a:lstStyle>
+            <a:lvl1pPr>
+              <a:defRPr sz="2800"/>
+            </a:lvl1pPr>
+            <a:lvl2pPr>
+              <a:defRPr sz="2400"/>
+            </a:lvl2pPr>
+            <a:lvl3pPr>
+              <a:defRPr sz="2000"/>
+            </a:lvl3pPr>
+            <a:lvl4pPr>
+              <a:defRPr sz="1800"/>
+            </a:lvl4pPr>
+            <a:lvl5pPr>
+              <a:defRPr sz="1800"/>
+            </a:lvl5pPr>
+            <a:lvl6pPr>
+              <a:defRPr sz="1800"/>
+            </a:lvl6pPr>
+            <a:lvl7pPr>
+              <a:defRPr sz="1800"/>
+            </a:lvl7pPr>
+            <a:lvl8pPr>
+              <a:defRPr sz="1800"/>
+            </a:lvl8pPr>
+            <a:lvl9pPr>
+              <a:defRPr sz="1800"/>
+            </a:lvl9pPr>
+          </a:lstStyle>
           <a:p>
             <a:pPr lvl="0"/>
             <a:r>
-              <a:rPr lang="en-US"/>
+              <a:rPr lang="en-GB"/>
               <a:t>Click to edit Master text styles</a:t>
             </a:r>
           </a:p>
           <a:p>
             <a:pPr lvl="1"/>
             <a:r>
-              <a:rPr lang="en-US"/>
+              <a:rPr lang="en-GB"/>
               <a:t>Second level</a:t>
             </a:r>
           </a:p>
           <a:p>
             <a:pPr lvl="2"/>
             <a:r>
-              <a:rPr lang="en-US"/>
+              <a:rPr lang="en-GB"/>
               <a:t>Third level</a:t>
             </a:r>
           </a:p>
           <a:p>
             <a:pPr lvl="3"/>
             <a:r>
-              <a:rPr lang="en-US"/>
+              <a:rPr lang="en-GB"/>
               <a:t>Fourth level</a:t>
             </a:r>
           </a:p>
           <a:p>
             <a:pPr lvl="4"/>
             <a:r>
-              <a:rPr lang="en-US"/>
+              <a:rPr lang="en-GB"/>
               <a:t>Fifth level</a:t>
             </a:r>
-            <a:endParaRPr lang="en-US" dirty="0"/>
+            <a:endParaRPr lang="en-US"/>
           </a:p>
         </p:txBody>
       </p:sp>
@@ -1496,48 +1818,76 @@
         </p:nvSpPr>
         <p:spPr>
           <a:xfrm>
-            <a:off x="6172200" y="1825625"/>
-            <a:ext cx="5181600" cy="4351338"/>
+            <a:off x="6197600" y="1600201"/>
+            <a:ext cx="5384800" cy="4525963"/>
           </a:xfrm>
         </p:spPr>
         <p:txBody>
           <a:bodyPr/>
-          <a:lstStyle/>
+          <a:lstStyle>
+            <a:lvl1pPr>
+              <a:defRPr sz="2800"/>
+            </a:lvl1pPr>
+            <a:lvl2pPr>
+              <a:defRPr sz="2400"/>
+            </a:lvl2pPr>
+            <a:lvl3pPr>
+              <a:defRPr sz="2000"/>
+            </a:lvl3pPr>
+            <a:lvl4pPr>
+              <a:defRPr sz="1800"/>
+            </a:lvl4pPr>
+            <a:lvl5pPr>
+              <a:defRPr sz="1800"/>
+            </a:lvl5pPr>
+            <a:lvl6pPr>
+              <a:defRPr sz="1800"/>
+            </a:lvl6pPr>
+            <a:lvl7pPr>
+              <a:defRPr sz="1800"/>
+            </a:lvl7pPr>
+            <a:lvl8pPr>
+              <a:defRPr sz="1800"/>
+            </a:lvl8pPr>
+            <a:lvl9pPr>
+              <a:defRPr sz="1800"/>
+            </a:lvl9pPr>
+          </a:lstStyle>
           <a:p>
             <a:pPr lvl="0"/>
             <a:r>
-              <a:rPr lang="en-US"/>
+              <a:rPr lang="en-GB"/>
               <a:t>Click to edit Master text styles</a:t>
             </a:r>
           </a:p>
           <a:p>
             <a:pPr lvl="1"/>
             <a:r>
-              <a:rPr lang="en-US"/>
+              <a:rPr lang="en-GB"/>
               <a:t>Second level</a:t>
             </a:r>
           </a:p>
           <a:p>
             <a:pPr lvl="2"/>
             <a:r>
-              <a:rPr lang="en-US"/>
+              <a:rPr lang="en-GB"/>
               <a:t>Third level</a:t>
             </a:r>
           </a:p>
           <a:p>
             <a:pPr lvl="3"/>
             <a:r>
-              <a:rPr lang="en-US"/>
+              <a:rPr lang="en-GB"/>
               <a:t>Fourth level</a:t>
             </a:r>
           </a:p>
           <a:p>
             <a:pPr lvl="4"/>
             <a:r>
-              <a:rPr lang="en-US"/>
+              <a:rPr lang="en-GB"/>
               <a:t>Fifth level</a:t>
             </a:r>
-            <a:endParaRPr lang="en-US" dirty="0"/>
+            <a:endParaRPr lang="en-US"/>
           </a:p>
         </p:txBody>
       </p:sp>
@@ -1557,8 +1907,8 @@
           <a:lstStyle/>
           <a:p>
             <a:fld id="{C764DE79-268F-4C1A-8933-263129D2AF90}" type="datetimeFigureOut">
-              <a:rPr lang="en-US" dirty="0"/>
-              <a:t>9/12/2025</a:t>
+              <a:rPr lang="en-US" smtClean="0"/>
+              <a:t>9/14/25</a:t>
             </a:fld>
             <a:endParaRPr lang="en-US" dirty="0"/>
           </a:p>
@@ -1606,10 +1956,86 @@
           </a:p>
         </p:txBody>
       </p:sp>
+      <p:cxnSp>
+        <p:nvCxnSpPr>
+          <p:cNvPr id="8" name="Straight Connector 7"/>
+          <p:cNvCxnSpPr/>
+          <p:nvPr/>
+        </p:nvCxnSpPr>
+        <p:spPr>
+          <a:xfrm>
+            <a:off x="609600" y="1447800"/>
+            <a:ext cx="11074400" cy="0"/>
+          </a:xfrm>
+          <a:prstGeom prst="line">
+            <a:avLst/>
+          </a:prstGeom>
+          <a:ln w="12700">
+            <a:solidFill>
+              <a:schemeClr val="tx1"/>
+            </a:solidFill>
+          </a:ln>
+        </p:spPr>
+        <p:style>
+          <a:lnRef idx="1">
+            <a:schemeClr val="accent1"/>
+          </a:lnRef>
+          <a:fillRef idx="0">
+            <a:schemeClr val="accent1"/>
+          </a:fillRef>
+          <a:effectRef idx="0">
+            <a:schemeClr val="accent1"/>
+          </a:effectRef>
+          <a:fontRef idx="minor">
+            <a:schemeClr val="tx1"/>
+          </a:fontRef>
+        </p:style>
+      </p:cxnSp>
+      <p:cxnSp>
+        <p:nvCxnSpPr>
+          <p:cNvPr id="9" name="Straight Connector 8">
+            <a:extLst>
+              <a:ext uri="{FF2B5EF4-FFF2-40B4-BE49-F238E27FC236}">
+                <a16:creationId xmlns:a16="http://schemas.microsoft.com/office/drawing/2014/main" id="{0F42A16B-6893-A143-E832-A99D7B6427B3}"/>
+              </a:ext>
+            </a:extLst>
+          </p:cNvPr>
+          <p:cNvCxnSpPr/>
+          <p:nvPr/>
+        </p:nvCxnSpPr>
+        <p:spPr>
+          <a:xfrm>
+            <a:off x="609600" y="1447800"/>
+            <a:ext cx="11074400" cy="0"/>
+          </a:xfrm>
+          <a:prstGeom prst="line">
+            <a:avLst/>
+          </a:prstGeom>
+          <a:ln w="12700">
+            <a:solidFill>
+              <a:schemeClr val="tx1"/>
+            </a:solidFill>
+          </a:ln>
+        </p:spPr>
+        <p:style>
+          <a:lnRef idx="1">
+            <a:schemeClr val="accent1"/>
+          </a:lnRef>
+          <a:fillRef idx="0">
+            <a:schemeClr val="accent1"/>
+          </a:fillRef>
+          <a:effectRef idx="0">
+            <a:schemeClr val="accent1"/>
+          </a:effectRef>
+          <a:fontRef idx="minor">
+            <a:schemeClr val="tx1"/>
+          </a:fontRef>
+        </p:style>
+      </p:cxnSp>
     </p:spTree>
     <p:extLst>
       <p:ext uri="{BB962C8B-B14F-4D97-AF65-F5344CB8AC3E}">
-        <p14:creationId xmlns:p14="http://schemas.microsoft.com/office/powerpoint/2010/main" val="713083229"/>
+        <p14:creationId xmlns:p14="http://schemas.microsoft.com/office/powerpoint/2010/main" val="2432674794"/>
       </p:ext>
     </p:extLst>
   </p:cSld>
@@ -1646,18 +2072,24 @@
             <p:ph type="title"/>
           </p:nvPr>
         </p:nvSpPr>
-        <p:spPr>
-          <a:xfrm>
-            <a:off x="839788" y="365125"/>
-            <a:ext cx="10515600" cy="1325563"/>
-          </a:xfrm>
-        </p:spPr>
+        <p:spPr/>
         <p:txBody>
           <a:bodyPr/>
-          <a:lstStyle/>
-          <a:p>
-            <a:r>
-              <a:rPr lang="en-US"/>
+          <a:lstStyle>
+            <a:lvl1pPr algn="l">
+              <a:defRPr>
+                <a:solidFill>
+                  <a:schemeClr val="tx1">
+                    <a:lumMod val="65000"/>
+                    <a:lumOff val="35000"/>
+                  </a:schemeClr>
+                </a:solidFill>
+              </a:defRPr>
+            </a:lvl1pPr>
+          </a:lstStyle>
+          <a:p>
+            <a:r>
+              <a:rPr lang="en-GB"/>
               <a:t>Click to edit Master title style</a:t>
             </a:r>
             <a:endParaRPr lang="en-US" dirty="0"/>
@@ -1676,8 +2108,8 @@
         </p:nvSpPr>
         <p:spPr>
           <a:xfrm>
-            <a:off x="839788" y="1681163"/>
-            <a:ext cx="5157787" cy="823912"/>
+            <a:off x="609600" y="1535113"/>
+            <a:ext cx="5386917" cy="639762"/>
           </a:xfrm>
         </p:spPr>
         <p:txBody>
@@ -1723,7 +2155,7 @@
           <a:p>
             <a:pPr lvl="0"/>
             <a:r>
-              <a:rPr lang="en-US"/>
+              <a:rPr lang="en-GB"/>
               <a:t>Click to edit Master text styles</a:t>
             </a:r>
           </a:p>
@@ -1741,48 +2173,76 @@
         </p:nvSpPr>
         <p:spPr>
           <a:xfrm>
-            <a:off x="839788" y="2505075"/>
-            <a:ext cx="5157787" cy="3684588"/>
+            <a:off x="609600" y="2174875"/>
+            <a:ext cx="5386917" cy="3951288"/>
           </a:xfrm>
         </p:spPr>
         <p:txBody>
           <a:bodyPr/>
-          <a:lstStyle/>
+          <a:lstStyle>
+            <a:lvl1pPr>
+              <a:defRPr sz="2400"/>
+            </a:lvl1pPr>
+            <a:lvl2pPr>
+              <a:defRPr sz="2000"/>
+            </a:lvl2pPr>
+            <a:lvl3pPr>
+              <a:defRPr sz="1800"/>
+            </a:lvl3pPr>
+            <a:lvl4pPr>
+              <a:defRPr sz="1600"/>
+            </a:lvl4pPr>
+            <a:lvl5pPr>
+              <a:defRPr sz="1600"/>
+            </a:lvl5pPr>
+            <a:lvl6pPr>
+              <a:defRPr sz="1600"/>
+            </a:lvl6pPr>
+            <a:lvl7pPr>
+              <a:defRPr sz="1600"/>
+            </a:lvl7pPr>
+            <a:lvl8pPr>
+              <a:defRPr sz="1600"/>
+            </a:lvl8pPr>
+            <a:lvl9pPr>
+              <a:defRPr sz="1600"/>
+            </a:lvl9pPr>
+          </a:lstStyle>
           <a:p>
             <a:pPr lvl="0"/>
             <a:r>
-              <a:rPr lang="en-US"/>
+              <a:rPr lang="en-GB"/>
               <a:t>Click to edit Master text styles</a:t>
             </a:r>
           </a:p>
           <a:p>
             <a:pPr lvl="1"/>
             <a:r>
-              <a:rPr lang="en-US"/>
+              <a:rPr lang="en-GB"/>
               <a:t>Second level</a:t>
             </a:r>
           </a:p>
           <a:p>
             <a:pPr lvl="2"/>
             <a:r>
-              <a:rPr lang="en-US"/>
+              <a:rPr lang="en-GB"/>
               <a:t>Third level</a:t>
             </a:r>
           </a:p>
           <a:p>
             <a:pPr lvl="3"/>
             <a:r>
-              <a:rPr lang="en-US"/>
+              <a:rPr lang="en-GB"/>
               <a:t>Fourth level</a:t>
             </a:r>
           </a:p>
           <a:p>
             <a:pPr lvl="4"/>
             <a:r>
-              <a:rPr lang="en-US"/>
+              <a:rPr lang="en-GB"/>
               <a:t>Fifth level</a:t>
             </a:r>
-            <a:endParaRPr lang="en-US" dirty="0"/>
+            <a:endParaRPr lang="en-US"/>
           </a:p>
         </p:txBody>
       </p:sp>
@@ -1798,8 +2258,8 @@
         </p:nvSpPr>
         <p:spPr>
           <a:xfrm>
-            <a:off x="6172200" y="1681163"/>
-            <a:ext cx="5183188" cy="823912"/>
+            <a:off x="6193368" y="1535113"/>
+            <a:ext cx="5389033" cy="639762"/>
           </a:xfrm>
         </p:spPr>
         <p:txBody>
@@ -1845,7 +2305,7 @@
           <a:p>
             <a:pPr lvl="0"/>
             <a:r>
-              <a:rPr lang="en-US"/>
+              <a:rPr lang="en-GB"/>
               <a:t>Click to edit Master text styles</a:t>
             </a:r>
           </a:p>
@@ -1863,48 +2323,76 @@
         </p:nvSpPr>
         <p:spPr>
           <a:xfrm>
-            <a:off x="6172200" y="2505075"/>
-            <a:ext cx="5183188" cy="3684588"/>
+            <a:off x="6193368" y="2174875"/>
+            <a:ext cx="5389033" cy="3951288"/>
           </a:xfrm>
         </p:spPr>
         <p:txBody>
           <a:bodyPr/>
-          <a:lstStyle/>
+          <a:lstStyle>
+            <a:lvl1pPr>
+              <a:defRPr sz="2400"/>
+            </a:lvl1pPr>
+            <a:lvl2pPr>
+              <a:defRPr sz="2000"/>
+            </a:lvl2pPr>
+            <a:lvl3pPr>
+              <a:defRPr sz="1800"/>
+            </a:lvl3pPr>
+            <a:lvl4pPr>
+              <a:defRPr sz="1600"/>
+            </a:lvl4pPr>
+            <a:lvl5pPr>
+              <a:defRPr sz="1600"/>
+            </a:lvl5pPr>
+            <a:lvl6pPr>
+              <a:defRPr sz="1600"/>
+            </a:lvl6pPr>
+            <a:lvl7pPr>
+              <a:defRPr sz="1600"/>
+            </a:lvl7pPr>
+            <a:lvl8pPr>
+              <a:defRPr sz="1600"/>
+            </a:lvl8pPr>
+            <a:lvl9pPr>
+              <a:defRPr sz="1600"/>
+            </a:lvl9pPr>
+          </a:lstStyle>
           <a:p>
             <a:pPr lvl="0"/>
             <a:r>
-              <a:rPr lang="en-US"/>
+              <a:rPr lang="en-GB"/>
               <a:t>Click to edit Master text styles</a:t>
             </a:r>
           </a:p>
           <a:p>
             <a:pPr lvl="1"/>
             <a:r>
-              <a:rPr lang="en-US"/>
+              <a:rPr lang="en-GB"/>
               <a:t>Second level</a:t>
             </a:r>
           </a:p>
           <a:p>
             <a:pPr lvl="2"/>
             <a:r>
-              <a:rPr lang="en-US"/>
+              <a:rPr lang="en-GB"/>
               <a:t>Third level</a:t>
             </a:r>
           </a:p>
           <a:p>
             <a:pPr lvl="3"/>
             <a:r>
-              <a:rPr lang="en-US"/>
+              <a:rPr lang="en-GB"/>
               <a:t>Fourth level</a:t>
             </a:r>
           </a:p>
           <a:p>
             <a:pPr lvl="4"/>
             <a:r>
-              <a:rPr lang="en-US"/>
+              <a:rPr lang="en-GB"/>
               <a:t>Fifth level</a:t>
             </a:r>
-            <a:endParaRPr lang="en-US" dirty="0"/>
+            <a:endParaRPr lang="en-US"/>
           </a:p>
         </p:txBody>
       </p:sp>
@@ -1924,8 +2412,8 @@
           <a:lstStyle/>
           <a:p>
             <a:fld id="{C764DE79-268F-4C1A-8933-263129D2AF90}" type="datetimeFigureOut">
-              <a:rPr lang="en-US" dirty="0"/>
-              <a:t>9/12/2025</a:t>
+              <a:rPr lang="en-US" smtClean="0"/>
+              <a:t>9/14/25</a:t>
             </a:fld>
             <a:endParaRPr lang="en-US" dirty="0"/>
           </a:p>
@@ -1973,10 +2461,45 @@
           </a:p>
         </p:txBody>
       </p:sp>
+      <p:cxnSp>
+        <p:nvCxnSpPr>
+          <p:cNvPr id="10" name="Straight Connector 9"/>
+          <p:cNvCxnSpPr/>
+          <p:nvPr/>
+        </p:nvCxnSpPr>
+        <p:spPr>
+          <a:xfrm>
+            <a:off x="609600" y="1447800"/>
+            <a:ext cx="11074400" cy="0"/>
+          </a:xfrm>
+          <a:prstGeom prst="line">
+            <a:avLst/>
+          </a:prstGeom>
+          <a:ln w="12700">
+            <a:solidFill>
+              <a:schemeClr val="tx1"/>
+            </a:solidFill>
+          </a:ln>
+        </p:spPr>
+        <p:style>
+          <a:lnRef idx="1">
+            <a:schemeClr val="accent1"/>
+          </a:lnRef>
+          <a:fillRef idx="0">
+            <a:schemeClr val="accent1"/>
+          </a:fillRef>
+          <a:effectRef idx="0">
+            <a:schemeClr val="accent1"/>
+          </a:effectRef>
+          <a:fontRef idx="minor">
+            <a:schemeClr val="tx1"/>
+          </a:fontRef>
+        </p:style>
+      </p:cxnSp>
     </p:spTree>
     <p:extLst>
       <p:ext uri="{BB962C8B-B14F-4D97-AF65-F5344CB8AC3E}">
-        <p14:creationId xmlns:p14="http://schemas.microsoft.com/office/powerpoint/2010/main" val="625432069"/>
+        <p14:creationId xmlns:p14="http://schemas.microsoft.com/office/powerpoint/2010/main" val="2664483366"/>
       </p:ext>
     </p:extLst>
   </p:cSld>
@@ -2016,10 +2539,21 @@
         <p:spPr/>
         <p:txBody>
           <a:bodyPr/>
-          <a:lstStyle/>
-          <a:p>
-            <a:r>
-              <a:rPr lang="en-US"/>
+          <a:lstStyle>
+            <a:lvl1pPr algn="l">
+              <a:defRPr>
+                <a:solidFill>
+                  <a:schemeClr val="tx1">
+                    <a:lumMod val="65000"/>
+                    <a:lumOff val="35000"/>
+                  </a:schemeClr>
+                </a:solidFill>
+              </a:defRPr>
+            </a:lvl1pPr>
+          </a:lstStyle>
+          <a:p>
+            <a:r>
+              <a:rPr lang="en-GB"/>
               <a:t>Click to edit Master title style</a:t>
             </a:r>
             <a:endParaRPr lang="en-US" dirty="0"/>
@@ -2042,8 +2576,8 @@
           <a:lstStyle/>
           <a:p>
             <a:fld id="{C764DE79-268F-4C1A-8933-263129D2AF90}" type="datetimeFigureOut">
-              <a:rPr lang="en-US" dirty="0"/>
-              <a:t>9/12/2025</a:t>
+              <a:rPr lang="en-US" smtClean="0"/>
+              <a:t>9/14/25</a:t>
             </a:fld>
             <a:endParaRPr lang="en-US" dirty="0"/>
           </a:p>
@@ -2091,10 +2625,86 @@
           </a:p>
         </p:txBody>
       </p:sp>
+      <p:cxnSp>
+        <p:nvCxnSpPr>
+          <p:cNvPr id="6" name="Straight Connector 5"/>
+          <p:cNvCxnSpPr/>
+          <p:nvPr/>
+        </p:nvCxnSpPr>
+        <p:spPr>
+          <a:xfrm>
+            <a:off x="609600" y="1447800"/>
+            <a:ext cx="11074400" cy="0"/>
+          </a:xfrm>
+          <a:prstGeom prst="line">
+            <a:avLst/>
+          </a:prstGeom>
+          <a:ln w="12700">
+            <a:solidFill>
+              <a:schemeClr val="tx1"/>
+            </a:solidFill>
+          </a:ln>
+        </p:spPr>
+        <p:style>
+          <a:lnRef idx="1">
+            <a:schemeClr val="accent1"/>
+          </a:lnRef>
+          <a:fillRef idx="0">
+            <a:schemeClr val="accent1"/>
+          </a:fillRef>
+          <a:effectRef idx="0">
+            <a:schemeClr val="accent1"/>
+          </a:effectRef>
+          <a:fontRef idx="minor">
+            <a:schemeClr val="tx1"/>
+          </a:fontRef>
+        </p:style>
+      </p:cxnSp>
+      <p:cxnSp>
+        <p:nvCxnSpPr>
+          <p:cNvPr id="7" name="Straight Connector 6">
+            <a:extLst>
+              <a:ext uri="{FF2B5EF4-FFF2-40B4-BE49-F238E27FC236}">
+                <a16:creationId xmlns:a16="http://schemas.microsoft.com/office/drawing/2014/main" id="{BDB4946F-2A50-46DF-D246-8E463A5B9E4E}"/>
+              </a:ext>
+            </a:extLst>
+          </p:cNvPr>
+          <p:cNvCxnSpPr/>
+          <p:nvPr/>
+        </p:nvCxnSpPr>
+        <p:spPr>
+          <a:xfrm>
+            <a:off x="609600" y="1447800"/>
+            <a:ext cx="11074400" cy="0"/>
+          </a:xfrm>
+          <a:prstGeom prst="line">
+            <a:avLst/>
+          </a:prstGeom>
+          <a:ln w="12700">
+            <a:solidFill>
+              <a:schemeClr val="tx1"/>
+            </a:solidFill>
+          </a:ln>
+        </p:spPr>
+        <p:style>
+          <a:lnRef idx="1">
+            <a:schemeClr val="accent1"/>
+          </a:lnRef>
+          <a:fillRef idx="0">
+            <a:schemeClr val="accent1"/>
+          </a:fillRef>
+          <a:effectRef idx="0">
+            <a:schemeClr val="accent1"/>
+          </a:effectRef>
+          <a:fontRef idx="minor">
+            <a:schemeClr val="tx1"/>
+          </a:fontRef>
+        </p:style>
+      </p:cxnSp>
     </p:spTree>
     <p:extLst>
       <p:ext uri="{BB962C8B-B14F-4D97-AF65-F5344CB8AC3E}">
-        <p14:creationId xmlns:p14="http://schemas.microsoft.com/office/powerpoint/2010/main" val="699261263"/>
+        <p14:creationId xmlns:p14="http://schemas.microsoft.com/office/powerpoint/2010/main" val="2495707260"/>
       </p:ext>
     </p:extLst>
   </p:cSld>
@@ -2137,8 +2747,8 @@
           <a:lstStyle/>
           <a:p>
             <a:fld id="{C764DE79-268F-4C1A-8933-263129D2AF90}" type="datetimeFigureOut">
-              <a:rPr lang="en-US" dirty="0"/>
-              <a:t>9/12/2025</a:t>
+              <a:rPr lang="en-US" smtClean="0"/>
+              <a:t>9/14/25</a:t>
             </a:fld>
             <a:endParaRPr lang="en-US" dirty="0"/>
           </a:p>
@@ -2189,7 +2799,7 @@
     </p:spTree>
     <p:extLst>
       <p:ext uri="{BB962C8B-B14F-4D97-AF65-F5344CB8AC3E}">
-        <p14:creationId xmlns:p14="http://schemas.microsoft.com/office/powerpoint/2010/main" val="766649737"/>
+        <p14:creationId xmlns:p14="http://schemas.microsoft.com/office/powerpoint/2010/main" val="633070568"/>
       </p:ext>
     </p:extLst>
   </p:cSld>
@@ -2228,23 +2838,23 @@
         </p:nvSpPr>
         <p:spPr>
           <a:xfrm>
-            <a:off x="839788" y="457200"/>
-            <a:ext cx="3932237" cy="1600200"/>
+            <a:off x="609601" y="273050"/>
+            <a:ext cx="4011084" cy="1162050"/>
           </a:xfrm>
         </p:spPr>
         <p:txBody>
           <a:bodyPr anchor="b"/>
           <a:lstStyle>
-            <a:lvl1pPr>
-              <a:defRPr sz="3200"/>
+            <a:lvl1pPr algn="l">
+              <a:defRPr sz="2000" b="1"/>
             </a:lvl1pPr>
           </a:lstStyle>
           <a:p>
             <a:r>
-              <a:rPr lang="en-US"/>
+              <a:rPr lang="en-GB"/>
               <a:t>Click to edit Master title style</a:t>
             </a:r>
-            <a:endParaRPr lang="en-US" dirty="0"/>
+            <a:endParaRPr lang="en-US"/>
           </a:p>
         </p:txBody>
       </p:sp>
@@ -2260,8 +2870,8 @@
         </p:nvSpPr>
         <p:spPr>
           <a:xfrm>
-            <a:off x="5183188" y="987425"/>
-            <a:ext cx="6172200" cy="4873625"/>
+            <a:off x="4766733" y="273051"/>
+            <a:ext cx="6815667" cy="5853113"/>
           </a:xfrm>
         </p:spPr>
         <p:txBody>
@@ -2298,38 +2908,38 @@
           <a:p>
             <a:pPr lvl="0"/>
             <a:r>
-              <a:rPr lang="en-US"/>
+              <a:rPr lang="en-GB"/>
               <a:t>Click to edit Master text styles</a:t>
             </a:r>
           </a:p>
           <a:p>
             <a:pPr lvl="1"/>
             <a:r>
-              <a:rPr lang="en-US"/>
+              <a:rPr lang="en-GB"/>
               <a:t>Second level</a:t>
             </a:r>
           </a:p>
           <a:p>
             <a:pPr lvl="2"/>
             <a:r>
-              <a:rPr lang="en-US"/>
+              <a:rPr lang="en-GB"/>
               <a:t>Third level</a:t>
             </a:r>
           </a:p>
           <a:p>
             <a:pPr lvl="3"/>
             <a:r>
-              <a:rPr lang="en-US"/>
+              <a:rPr lang="en-GB"/>
               <a:t>Fourth level</a:t>
             </a:r>
           </a:p>
           <a:p>
             <a:pPr lvl="4"/>
             <a:r>
-              <a:rPr lang="en-US"/>
+              <a:rPr lang="en-GB"/>
               <a:t>Fifth level</a:t>
             </a:r>
-            <a:endParaRPr lang="en-US" dirty="0"/>
+            <a:endParaRPr lang="en-US"/>
           </a:p>
         </p:txBody>
       </p:sp>
@@ -2345,8 +2955,8 @@
         </p:nvSpPr>
         <p:spPr>
           <a:xfrm>
-            <a:off x="839788" y="2057400"/>
-            <a:ext cx="3932237" cy="3811588"/>
+            <a:off x="609601" y="1435101"/>
+            <a:ext cx="4011084" cy="4691063"/>
           </a:xfrm>
         </p:spPr>
         <p:txBody>
@@ -2354,45 +2964,45 @@
           <a:lstStyle>
             <a:lvl1pPr marL="0" indent="0">
               <a:buNone/>
-              <a:defRPr sz="1600"/>
+              <a:defRPr sz="1400"/>
             </a:lvl1pPr>
             <a:lvl2pPr marL="457200" indent="0">
               <a:buNone/>
-              <a:defRPr sz="1400"/>
+              <a:defRPr sz="1200"/>
             </a:lvl2pPr>
             <a:lvl3pPr marL="914400" indent="0">
               <a:buNone/>
-              <a:defRPr sz="1200"/>
+              <a:defRPr sz="1000"/>
             </a:lvl3pPr>
             <a:lvl4pPr marL="1371600" indent="0">
               <a:buNone/>
-              <a:defRPr sz="1000"/>
+              <a:defRPr sz="900"/>
             </a:lvl4pPr>
             <a:lvl5pPr marL="1828800" indent="0">
               <a:buNone/>
-              <a:defRPr sz="1000"/>
+              <a:defRPr sz="900"/>
             </a:lvl5pPr>
             <a:lvl6pPr marL="2286000" indent="0">
               <a:buNone/>
-              <a:defRPr sz="1000"/>
+              <a:defRPr sz="900"/>
             </a:lvl6pPr>
             <a:lvl7pPr marL="2743200" indent="0">
               <a:buNone/>
-              <a:defRPr sz="1000"/>
+              <a:defRPr sz="900"/>
             </a:lvl7pPr>
             <a:lvl8pPr marL="3200400" indent="0">
               <a:buNone/>
-              <a:defRPr sz="1000"/>
+              <a:defRPr sz="900"/>
             </a:lvl8pPr>
             <a:lvl9pPr marL="3657600" indent="0">
               <a:buNone/>
-              <a:defRPr sz="1000"/>
+              <a:defRPr sz="900"/>
             </a:lvl9pPr>
           </a:lstStyle>
           <a:p>
             <a:pPr lvl="0"/>
             <a:r>
-              <a:rPr lang="en-US"/>
+              <a:rPr lang="en-GB"/>
               <a:t>Click to edit Master text styles</a:t>
             </a:r>
           </a:p>
@@ -2414,8 +3024,8 @@
           <a:lstStyle/>
           <a:p>
             <a:fld id="{C764DE79-268F-4C1A-8933-263129D2AF90}" type="datetimeFigureOut">
-              <a:rPr lang="en-US" dirty="0"/>
-              <a:t>9/12/2025</a:t>
+              <a:rPr lang="en-US" smtClean="0"/>
+              <a:t>9/14/25</a:t>
             </a:fld>
             <a:endParaRPr lang="en-US" dirty="0"/>
           </a:p>
@@ -2466,7 +3076,7 @@
     </p:spTree>
     <p:extLst>
       <p:ext uri="{BB962C8B-B14F-4D97-AF65-F5344CB8AC3E}">
-        <p14:creationId xmlns:p14="http://schemas.microsoft.com/office/powerpoint/2010/main" val="854008452"/>
+        <p14:creationId xmlns:p14="http://schemas.microsoft.com/office/powerpoint/2010/main" val="1203895500"/>
       </p:ext>
     </p:extLst>
   </p:cSld>
@@ -2505,23 +3115,23 @@
         </p:nvSpPr>
         <p:spPr>
           <a:xfrm>
-            <a:off x="839788" y="457200"/>
-            <a:ext cx="3932237" cy="1600200"/>
+            <a:off x="2389717" y="4800600"/>
+            <a:ext cx="7315200" cy="566738"/>
           </a:xfrm>
         </p:spPr>
         <p:txBody>
           <a:bodyPr anchor="b"/>
           <a:lstStyle>
-            <a:lvl1pPr>
-              <a:defRPr sz="3200"/>
+            <a:lvl1pPr algn="l">
+              <a:defRPr sz="2000" b="1"/>
             </a:lvl1pPr>
           </a:lstStyle>
           <a:p>
             <a:r>
-              <a:rPr lang="en-US"/>
+              <a:rPr lang="en-GB"/>
               <a:t>Click to edit Master title style</a:t>
             </a:r>
-            <a:endParaRPr lang="en-US" dirty="0"/>
+            <a:endParaRPr lang="en-US"/>
           </a:p>
         </p:txBody>
       </p:sp>
@@ -2529,7 +3139,7 @@
         <p:nvSpPr>
           <p:cNvPr id="3" name="Picture Placeholder 2"/>
           <p:cNvSpPr>
-            <a:spLocks noGrp="1" noChangeAspect="1"/>
+            <a:spLocks noGrp="1"/>
           </p:cNvSpPr>
           <p:nvPr>
             <p:ph type="pic" idx="1"/>
@@ -2537,12 +3147,12 @@
         </p:nvSpPr>
         <p:spPr>
           <a:xfrm>
-            <a:off x="5183188" y="987425"/>
-            <a:ext cx="6172200" cy="4873625"/>
+            <a:off x="2389717" y="612775"/>
+            <a:ext cx="7315200" cy="4114800"/>
           </a:xfrm>
         </p:spPr>
         <p:txBody>
-          <a:bodyPr anchor="t"/>
+          <a:bodyPr/>
           <a:lstStyle>
             <a:lvl1pPr marL="0" indent="0">
               <a:buNone/>
@@ -2583,10 +3193,10 @@
           </a:lstStyle>
           <a:p>
             <a:r>
-              <a:rPr lang="en-US"/>
+              <a:rPr lang="en-GB"/>
               <a:t>Click icon to add picture</a:t>
             </a:r>
-            <a:endParaRPr lang="en-US" dirty="0"/>
+            <a:endParaRPr lang="en-US"/>
           </a:p>
         </p:txBody>
       </p:sp>
@@ -2602,8 +3212,8 @@
         </p:nvSpPr>
         <p:spPr>
           <a:xfrm>
-            <a:off x="839788" y="2057400"/>
-            <a:ext cx="3932237" cy="3811588"/>
+            <a:off x="2389717" y="5367338"/>
+            <a:ext cx="7315200" cy="804862"/>
           </a:xfrm>
         </p:spPr>
         <p:txBody>
@@ -2611,45 +3221,45 @@
           <a:lstStyle>
             <a:lvl1pPr marL="0" indent="0">
               <a:buNone/>
-              <a:defRPr sz="1600"/>
+              <a:defRPr sz="1400"/>
             </a:lvl1pPr>
             <a:lvl2pPr marL="457200" indent="0">
               <a:buNone/>
-              <a:defRPr sz="1400"/>
+              <a:defRPr sz="1200"/>
             </a:lvl2pPr>
             <a:lvl3pPr marL="914400" indent="0">
               <a:buNone/>
-              <a:defRPr sz="1200"/>
+              <a:defRPr sz="1000"/>
             </a:lvl3pPr>
             <a:lvl4pPr marL="1371600" indent="0">
               <a:buNone/>
-              <a:defRPr sz="1000"/>
+              <a:defRPr sz="900"/>
             </a:lvl4pPr>
             <a:lvl5pPr marL="1828800" indent="0">
               <a:buNone/>
-              <a:defRPr sz="1000"/>
+              <a:defRPr sz="900"/>
             </a:lvl5pPr>
             <a:lvl6pPr marL="2286000" indent="0">
               <a:buNone/>
-              <a:defRPr sz="1000"/>
+              <a:defRPr sz="900"/>
             </a:lvl6pPr>
             <a:lvl7pPr marL="2743200" indent="0">
               <a:buNone/>
-              <a:defRPr sz="1000"/>
+              <a:defRPr sz="900"/>
             </a:lvl7pPr>
             <a:lvl8pPr marL="3200400" indent="0">
               <a:buNone/>
-              <a:defRPr sz="1000"/>
+              <a:defRPr sz="900"/>
             </a:lvl8pPr>
             <a:lvl9pPr marL="3657600" indent="0">
               <a:buNone/>
-              <a:defRPr sz="1000"/>
+              <a:defRPr sz="900"/>
             </a:lvl9pPr>
           </a:lstStyle>
           <a:p>
             <a:pPr lvl="0"/>
             <a:r>
-              <a:rPr lang="en-US"/>
+              <a:rPr lang="en-GB"/>
               <a:t>Click to edit Master text styles</a:t>
             </a:r>
           </a:p>
@@ -2671,8 +3281,8 @@
           <a:lstStyle/>
           <a:p>
             <a:fld id="{C764DE79-268F-4C1A-8933-263129D2AF90}" type="datetimeFigureOut">
-              <a:rPr lang="en-US" dirty="0"/>
-              <a:t>9/12/2025</a:t>
+              <a:rPr lang="en-US" smtClean="0"/>
+              <a:t>9/14/25</a:t>
             </a:fld>
             <a:endParaRPr lang="en-US" dirty="0"/>
           </a:p>
@@ -2723,7 +3333,7 @@
     </p:spTree>
     <p:extLst>
       <p:ext uri="{BB962C8B-B14F-4D97-AF65-F5344CB8AC3E}">
-        <p14:creationId xmlns:p14="http://schemas.microsoft.com/office/powerpoint/2010/main" val="2021308930"/>
+        <p14:creationId xmlns:p14="http://schemas.microsoft.com/office/powerpoint/2010/main" val="2721596268"/>
       </p:ext>
     </p:extLst>
   </p:cSld>
@@ -2767,8 +3377,8 @@
         </p:nvSpPr>
         <p:spPr>
           <a:xfrm>
-            <a:off x="838200" y="365125"/>
-            <a:ext cx="10515600" cy="1325563"/>
+            <a:off x="609600" y="274638"/>
+            <a:ext cx="10972800" cy="1143000"/>
           </a:xfrm>
           <a:prstGeom prst="rect">
             <a:avLst/>
@@ -2781,10 +3391,10 @@
           <a:lstStyle/>
           <a:p>
             <a:r>
-              <a:rPr lang="en-US"/>
+              <a:rPr lang="en-GB"/>
               <a:t>Click to edit Master title style</a:t>
             </a:r>
-            <a:endParaRPr lang="en-US" dirty="0"/>
+            <a:endParaRPr lang="en-US"/>
           </a:p>
         </p:txBody>
       </p:sp>
@@ -2800,8 +3410,8 @@
         </p:nvSpPr>
         <p:spPr>
           <a:xfrm>
-            <a:off x="838200" y="1825625"/>
-            <a:ext cx="10515600" cy="4351338"/>
+            <a:off x="609600" y="1600201"/>
+            <a:ext cx="10972800" cy="4525963"/>
           </a:xfrm>
           <a:prstGeom prst="rect">
             <a:avLst/>
@@ -2815,38 +3425,38 @@
           <a:p>
             <a:pPr lvl="0"/>
             <a:r>
-              <a:rPr lang="en-US"/>
+              <a:rPr lang="en-GB"/>
               <a:t>Click to edit Master text styles</a:t>
             </a:r>
           </a:p>
           <a:p>
             <a:pPr lvl="1"/>
             <a:r>
-              <a:rPr lang="en-US"/>
+              <a:rPr lang="en-GB"/>
               <a:t>Second level</a:t>
             </a:r>
           </a:p>
           <a:p>
             <a:pPr lvl="2"/>
             <a:r>
-              <a:rPr lang="en-US"/>
+              <a:rPr lang="en-GB"/>
               <a:t>Third level</a:t>
             </a:r>
           </a:p>
           <a:p>
             <a:pPr lvl="3"/>
             <a:r>
-              <a:rPr lang="en-US"/>
+              <a:rPr lang="en-GB"/>
               <a:t>Fourth level</a:t>
             </a:r>
           </a:p>
           <a:p>
             <a:pPr lvl="4"/>
             <a:r>
-              <a:rPr lang="en-US"/>
+              <a:rPr lang="en-GB"/>
               <a:t>Fifth level</a:t>
             </a:r>
-            <a:endParaRPr lang="en-US" dirty="0"/>
+            <a:endParaRPr lang="en-US"/>
           </a:p>
         </p:txBody>
       </p:sp>
@@ -2862,8 +3472,8 @@
         </p:nvSpPr>
         <p:spPr>
           <a:xfrm>
-            <a:off x="838200" y="6356350"/>
-            <a:ext cx="2743200" cy="365125"/>
+            <a:off x="609600" y="6356351"/>
+            <a:ext cx="2844800" cy="365125"/>
           </a:xfrm>
           <a:prstGeom prst="rect">
             <a:avLst/>
@@ -2884,8 +3494,8 @@
           </a:lstStyle>
           <a:p>
             <a:fld id="{C764DE79-268F-4C1A-8933-263129D2AF90}" type="datetimeFigureOut">
-              <a:rPr lang="en-US" dirty="0"/>
-              <a:t>9/12/2025</a:t>
+              <a:rPr lang="en-US" smtClean="0"/>
+              <a:t>9/14/25</a:t>
             </a:fld>
             <a:endParaRPr lang="en-US" dirty="0"/>
           </a:p>
@@ -2903,8 +3513,8 @@
         </p:nvSpPr>
         <p:spPr>
           <a:xfrm>
-            <a:off x="4038600" y="6356350"/>
-            <a:ext cx="4114800" cy="365125"/>
+            <a:off x="4165600" y="6356351"/>
+            <a:ext cx="3860800" cy="365125"/>
           </a:xfrm>
           <a:prstGeom prst="rect">
             <a:avLst/>
@@ -2940,8 +3550,8 @@
         </p:nvSpPr>
         <p:spPr>
           <a:xfrm>
-            <a:off x="8610600" y="6356350"/>
-            <a:ext cx="2743200" cy="365125"/>
+            <a:off x="8737600" y="6356351"/>
+            <a:ext cx="2844800" cy="365125"/>
           </a:xfrm>
           <a:prstGeom prst="rect">
             <a:avLst/>
@@ -2972,31 +3582,29 @@
     </p:spTree>
     <p:extLst>
       <p:ext uri="{BB962C8B-B14F-4D97-AF65-F5344CB8AC3E}">
-        <p14:creationId xmlns:p14="http://schemas.microsoft.com/office/powerpoint/2010/main" val="918000212"/>
+        <p14:creationId xmlns:p14="http://schemas.microsoft.com/office/powerpoint/2010/main" val="2807430955"/>
       </p:ext>
     </p:extLst>
   </p:cSld>
   <p:clrMap bg1="lt1" tx1="dk1" bg2="lt2" tx2="dk2" accent1="accent1" accent2="accent2" accent3="accent3" accent4="accent4" accent5="accent5" accent6="accent6" hlink="hlink" folHlink="folHlink"/>
   <p:sldLayoutIdLst>
-    <p:sldLayoutId id="2147483656" r:id="rId1"/>
-    <p:sldLayoutId id="2147483657" r:id="rId2"/>
-    <p:sldLayoutId id="2147483658" r:id="rId3"/>
-    <p:sldLayoutId id="2147483659" r:id="rId4"/>
-    <p:sldLayoutId id="2147483660" r:id="rId5"/>
-    <p:sldLayoutId id="2147483661" r:id="rId6"/>
-    <p:sldLayoutId id="2147483662" r:id="rId7"/>
-    <p:sldLayoutId id="2147483663" r:id="rId8"/>
-    <p:sldLayoutId id="2147483664" r:id="rId9"/>
-    <p:sldLayoutId id="2147483665" r:id="rId10"/>
-    <p:sldLayoutId id="2147483666" r:id="rId11"/>
-    <p:sldLayoutId id="2147483668" r:id="rId12"/>
+    <p:sldLayoutId id="2147483670" r:id="rId1"/>
+    <p:sldLayoutId id="2147483671" r:id="rId2"/>
+    <p:sldLayoutId id="2147483672" r:id="rId3"/>
+    <p:sldLayoutId id="2147483673" r:id="rId4"/>
+    <p:sldLayoutId id="2147483674" r:id="rId5"/>
+    <p:sldLayoutId id="2147483675" r:id="rId6"/>
+    <p:sldLayoutId id="2147483676" r:id="rId7"/>
+    <p:sldLayoutId id="2147483677" r:id="rId8"/>
+    <p:sldLayoutId id="2147483678" r:id="rId9"/>
+    <p:sldLayoutId id="2147483679" r:id="rId10"/>
+    <p:sldLayoutId id="2147483680" r:id="rId11"/>
+    <p:sldLayoutId id="2147483681" r:id="rId12"/>
+    <p:sldLayoutId id="2147483682" r:id="rId13"/>
   </p:sldLayoutIdLst>
   <p:txStyles>
     <p:titleStyle>
-      <a:lvl1pPr algn="l" defTabSz="914400" rtl="0" eaLnBrk="1" latinLnBrk="0" hangingPunct="1">
-        <a:lnSpc>
-          <a:spcPct val="90000"/>
-        </a:lnSpc>
+      <a:lvl1pPr algn="ctr" defTabSz="914400" rtl="0" eaLnBrk="1" latinLnBrk="0" hangingPunct="1">
         <a:spcBef>
           <a:spcPct val="0"/>
         </a:spcBef>
@@ -3012,15 +3620,27 @@
       </a:lvl1pPr>
     </p:titleStyle>
     <p:bodyStyle>
-      <a:lvl1pPr marL="228600" indent="-228600" algn="l" defTabSz="914400" rtl="0" eaLnBrk="1" latinLnBrk="0" hangingPunct="1">
-        <a:lnSpc>
-          <a:spcPct val="90000"/>
-        </a:lnSpc>
+      <a:lvl1pPr marL="342900" indent="-342900" algn="l" defTabSz="914400" rtl="0" eaLnBrk="1" latinLnBrk="0" hangingPunct="1">
         <a:spcBef>
-          <a:spcPts val="1000"/>
+          <a:spcPct val="20000"/>
         </a:spcBef>
-        <a:buFont typeface="Arial" panose="020B0604020202020204" pitchFamily="34" charset="0"/>
+        <a:buFont typeface="Arial" pitchFamily="34" charset="0"/>
         <a:buChar char="•"/>
+        <a:defRPr sz="3200" kern="1200">
+          <a:solidFill>
+            <a:schemeClr val="tx1"/>
+          </a:solidFill>
+          <a:latin typeface="+mn-lt"/>
+          <a:ea typeface="+mn-ea"/>
+          <a:cs typeface="+mn-cs"/>
+        </a:defRPr>
+      </a:lvl1pPr>
+      <a:lvl2pPr marL="742950" indent="-285750" algn="l" defTabSz="914400" rtl="0" eaLnBrk="1" latinLnBrk="0" hangingPunct="1">
+        <a:spcBef>
+          <a:spcPct val="20000"/>
+        </a:spcBef>
+        <a:buFont typeface="Arial" pitchFamily="34" charset="0"/>
+        <a:buChar char="–"/>
         <a:defRPr sz="2800" kern="1200">
           <a:solidFill>
             <a:schemeClr val="tx1"/>
@@ -3029,15 +3649,12 @@
           <a:ea typeface="+mn-ea"/>
           <a:cs typeface="+mn-cs"/>
         </a:defRPr>
-      </a:lvl1pPr>
-      <a:lvl2pPr marL="685800" indent="-228600" algn="l" defTabSz="914400" rtl="0" eaLnBrk="1" latinLnBrk="0" hangingPunct="1">
-        <a:lnSpc>
-          <a:spcPct val="90000"/>
-        </a:lnSpc>
+      </a:lvl2pPr>
+      <a:lvl3pPr marL="1143000" indent="-228600" algn="l" defTabSz="914400" rtl="0" eaLnBrk="1" latinLnBrk="0" hangingPunct="1">
         <a:spcBef>
-          <a:spcPts val="500"/>
+          <a:spcPct val="20000"/>
         </a:spcBef>
-        <a:buFont typeface="Arial" panose="020B0604020202020204" pitchFamily="34" charset="0"/>
+        <a:buFont typeface="Arial" pitchFamily="34" charset="0"/>
         <a:buChar char="•"/>
         <a:defRPr sz="2400" kern="1200">
           <a:solidFill>
@@ -3047,15 +3664,42 @@
           <a:ea typeface="+mn-ea"/>
           <a:cs typeface="+mn-cs"/>
         </a:defRPr>
-      </a:lvl2pPr>
-      <a:lvl3pPr marL="1143000" indent="-228600" algn="l" defTabSz="914400" rtl="0" eaLnBrk="1" latinLnBrk="0" hangingPunct="1">
-        <a:lnSpc>
-          <a:spcPct val="90000"/>
-        </a:lnSpc>
+      </a:lvl3pPr>
+      <a:lvl4pPr marL="1600200" indent="-228600" algn="l" defTabSz="914400" rtl="0" eaLnBrk="1" latinLnBrk="0" hangingPunct="1">
         <a:spcBef>
-          <a:spcPts val="500"/>
+          <a:spcPct val="20000"/>
         </a:spcBef>
-        <a:buFont typeface="Arial" panose="020B0604020202020204" pitchFamily="34" charset="0"/>
+        <a:buFont typeface="Arial" pitchFamily="34" charset="0"/>
+        <a:buChar char="–"/>
+        <a:defRPr sz="2000" kern="1200">
+          <a:solidFill>
+            <a:schemeClr val="tx1"/>
+          </a:solidFill>
+          <a:latin typeface="+mn-lt"/>
+          <a:ea typeface="+mn-ea"/>
+          <a:cs typeface="+mn-cs"/>
+        </a:defRPr>
+      </a:lvl4pPr>
+      <a:lvl5pPr marL="2057400" indent="-228600" algn="l" defTabSz="914400" rtl="0" eaLnBrk="1" latinLnBrk="0" hangingPunct="1">
+        <a:spcBef>
+          <a:spcPct val="20000"/>
+        </a:spcBef>
+        <a:buFont typeface="Arial" pitchFamily="34" charset="0"/>
+        <a:buChar char="»"/>
+        <a:defRPr sz="2000" kern="1200">
+          <a:solidFill>
+            <a:schemeClr val="tx1"/>
+          </a:solidFill>
+          <a:latin typeface="+mn-lt"/>
+          <a:ea typeface="+mn-ea"/>
+          <a:cs typeface="+mn-cs"/>
+        </a:defRPr>
+      </a:lvl5pPr>
+      <a:lvl6pPr marL="2514600" indent="-228600" algn="l" defTabSz="914400" rtl="0" eaLnBrk="1" latinLnBrk="0" hangingPunct="1">
+        <a:spcBef>
+          <a:spcPct val="20000"/>
+        </a:spcBef>
+        <a:buFont typeface="Arial" pitchFamily="34" charset="0"/>
         <a:buChar char="•"/>
         <a:defRPr sz="2000" kern="1200">
           <a:solidFill>
@@ -3065,71 +3709,14 @@
           <a:ea typeface="+mn-ea"/>
           <a:cs typeface="+mn-cs"/>
         </a:defRPr>
-      </a:lvl3pPr>
-      <a:lvl4pPr marL="1600200" indent="-228600" algn="l" defTabSz="914400" rtl="0" eaLnBrk="1" latinLnBrk="0" hangingPunct="1">
-        <a:lnSpc>
-          <a:spcPct val="90000"/>
-        </a:lnSpc>
-        <a:spcBef>
-          <a:spcPts val="500"/>
-        </a:spcBef>
-        <a:buFont typeface="Arial" panose="020B0604020202020204" pitchFamily="34" charset="0"/>
-        <a:buChar char="•"/>
-        <a:defRPr sz="1800" kern="1200">
-          <a:solidFill>
-            <a:schemeClr val="tx1"/>
-          </a:solidFill>
-          <a:latin typeface="+mn-lt"/>
-          <a:ea typeface="+mn-ea"/>
-          <a:cs typeface="+mn-cs"/>
-        </a:defRPr>
-      </a:lvl4pPr>
-      <a:lvl5pPr marL="2057400" indent="-228600" algn="l" defTabSz="914400" rtl="0" eaLnBrk="1" latinLnBrk="0" hangingPunct="1">
-        <a:lnSpc>
-          <a:spcPct val="90000"/>
-        </a:lnSpc>
-        <a:spcBef>
-          <a:spcPts val="500"/>
-        </a:spcBef>
-        <a:buFont typeface="Arial" panose="020B0604020202020204" pitchFamily="34" charset="0"/>
-        <a:buChar char="•"/>
-        <a:defRPr sz="1800" kern="1200">
-          <a:solidFill>
-            <a:schemeClr val="tx1"/>
-          </a:solidFill>
-          <a:latin typeface="+mn-lt"/>
-          <a:ea typeface="+mn-ea"/>
-          <a:cs typeface="+mn-cs"/>
-        </a:defRPr>
-      </a:lvl5pPr>
-      <a:lvl6pPr marL="2514600" indent="-228600" algn="l" defTabSz="914400" rtl="0" eaLnBrk="1" latinLnBrk="0" hangingPunct="1">
-        <a:lnSpc>
-          <a:spcPct val="90000"/>
-        </a:lnSpc>
-        <a:spcBef>
-          <a:spcPts val="500"/>
-        </a:spcBef>
-        <a:buFont typeface="Arial" panose="020B0604020202020204" pitchFamily="34" charset="0"/>
-        <a:buChar char="•"/>
-        <a:defRPr sz="1800" kern="1200">
-          <a:solidFill>
-            <a:schemeClr val="tx1"/>
-          </a:solidFill>
-          <a:latin typeface="+mn-lt"/>
-          <a:ea typeface="+mn-ea"/>
-          <a:cs typeface="+mn-cs"/>
-        </a:defRPr>
       </a:lvl6pPr>
       <a:lvl7pPr marL="2971800" indent="-228600" algn="l" defTabSz="914400" rtl="0" eaLnBrk="1" latinLnBrk="0" hangingPunct="1">
-        <a:lnSpc>
-          <a:spcPct val="90000"/>
-        </a:lnSpc>
         <a:spcBef>
-          <a:spcPts val="500"/>
+          <a:spcPct val="20000"/>
         </a:spcBef>
-        <a:buFont typeface="Arial" panose="020B0604020202020204" pitchFamily="34" charset="0"/>
+        <a:buFont typeface="Arial" pitchFamily="34" charset="0"/>
         <a:buChar char="•"/>
-        <a:defRPr sz="1800" kern="1200">
+        <a:defRPr sz="2000" kern="1200">
           <a:solidFill>
             <a:schemeClr val="tx1"/>
           </a:solidFill>
@@ -3139,15 +3726,12 @@
         </a:defRPr>
       </a:lvl7pPr>
       <a:lvl8pPr marL="3429000" indent="-228600" algn="l" defTabSz="914400" rtl="0" eaLnBrk="1" latinLnBrk="0" hangingPunct="1">
-        <a:lnSpc>
-          <a:spcPct val="90000"/>
-        </a:lnSpc>
         <a:spcBef>
-          <a:spcPts val="500"/>
+          <a:spcPct val="20000"/>
         </a:spcBef>
-        <a:buFont typeface="Arial" panose="020B0604020202020204" pitchFamily="34" charset="0"/>
+        <a:buFont typeface="Arial" pitchFamily="34" charset="0"/>
         <a:buChar char="•"/>
-        <a:defRPr sz="1800" kern="1200">
+        <a:defRPr sz="2000" kern="1200">
           <a:solidFill>
             <a:schemeClr val="tx1"/>
           </a:solidFill>
@@ -3157,15 +3741,12 @@
         </a:defRPr>
       </a:lvl8pPr>
       <a:lvl9pPr marL="3886200" indent="-228600" algn="l" defTabSz="914400" rtl="0" eaLnBrk="1" latinLnBrk="0" hangingPunct="1">
-        <a:lnSpc>
-          <a:spcPct val="90000"/>
-        </a:lnSpc>
         <a:spcBef>
-          <a:spcPts val="500"/>
+          <a:spcPct val="20000"/>
         </a:spcBef>
-        <a:buFont typeface="Arial" panose="020B0604020202020204" pitchFamily="34" charset="0"/>
+        <a:buFont typeface="Arial" pitchFamily="34" charset="0"/>
         <a:buChar char="•"/>
-        <a:defRPr sz="1800" kern="1200">
+        <a:defRPr sz="2000" kern="1200">
           <a:solidFill>
             <a:schemeClr val="tx1"/>
           </a:solidFill>
@@ -3277,6 +3858,16 @@
 <file path=ppt/slides/slide1.xml><?xml version="1.0" encoding="utf-8"?>
 <p:sld xmlns:a="http://schemas.openxmlformats.org/drawingml/2006/main" xmlns:r="http://schemas.openxmlformats.org/officeDocument/2006/relationships" xmlns:p="http://schemas.openxmlformats.org/presentationml/2006/main">
   <p:cSld>
+    <p:bg>
+      <p:bgPr>
+        <a:solidFill>
+          <a:schemeClr val="bg1">
+            <a:lumMod val="85000"/>
+          </a:schemeClr>
+        </a:solidFill>
+        <a:effectLst/>
+      </p:bgPr>
+    </p:bg>
     <p:spTree>
       <p:nvGrpSpPr>
         <p:cNvPr id="1" name=""/>
@@ -3674,7 +4265,7 @@
           </a:ln>
           <a:extLst>
             <a:ext uri="{C572A759-6A51-4108-AA02-DFA0A04FC94B}">
-              <ma14:wrappingTextBoxFlag xmlns:ma14="http://schemas.microsoft.com/office/mac/drawingml/2011/main" xmlns:a14="http://schemas.microsoft.com/office/drawing/2010/main" xmlns:m="http://schemas.openxmlformats.org/officeDocument/2006/math" xmlns="" val="1"/>
+              <ma14:wrappingTextBoxFlag xmlns="" xmlns:m="http://schemas.openxmlformats.org/officeDocument/2006/math" xmlns:a14="http://schemas.microsoft.com/office/drawing/2010/main" xmlns:ma14="http://schemas.microsoft.com/office/mac/drawingml/2011/main" val="1"/>
             </a:ext>
           </a:extLst>
         </p:spPr>
@@ -3716,6 +4307,16 @@
 <file path=ppt/slides/slide10.xml><?xml version="1.0" encoding="utf-8"?>
 <p:sld xmlns:a="http://schemas.openxmlformats.org/drawingml/2006/main" xmlns:r="http://schemas.openxmlformats.org/officeDocument/2006/relationships" xmlns:p="http://schemas.openxmlformats.org/presentationml/2006/main">
   <p:cSld>
+    <p:bg>
+      <p:bgPr>
+        <a:solidFill>
+          <a:schemeClr val="bg1">
+            <a:lumMod val="85000"/>
+          </a:schemeClr>
+        </a:solidFill>
+        <a:effectLst/>
+      </p:bgPr>
+    </p:bg>
     <p:spTree>
       <p:nvGrpSpPr>
         <p:cNvPr id="1" name=""/>
@@ -3837,7 +4438,7 @@
           </a:prstGeom>
           <a:extLst>
             <a:ext uri="{C572A759-6A51-4108-AA02-DFA0A04FC94B}">
-              <ma14:wrappingTextBoxFlag xmlns:ma14="http://schemas.microsoft.com/office/mac/drawingml/2011/main" xmlns:a14="http://schemas.microsoft.com/office/drawing/2010/main" xmlns:m="http://schemas.openxmlformats.org/officeDocument/2006/math" xmlns="" val="1"/>
+              <ma14:wrappingTextBoxFlag xmlns="" xmlns:m="http://schemas.openxmlformats.org/officeDocument/2006/math" xmlns:a14="http://schemas.microsoft.com/office/drawing/2010/main" xmlns:ma14="http://schemas.microsoft.com/office/mac/drawingml/2011/main" val="1"/>
             </a:ext>
           </a:extLst>
         </p:spPr>
@@ -3864,6 +4465,16 @@
 <file path=ppt/slides/slide11.xml><?xml version="1.0" encoding="utf-8"?>
 <p:sld xmlns:a="http://schemas.openxmlformats.org/drawingml/2006/main" xmlns:r="http://schemas.openxmlformats.org/officeDocument/2006/relationships" xmlns:p="http://schemas.openxmlformats.org/presentationml/2006/main">
   <p:cSld>
+    <p:bg>
+      <p:bgPr>
+        <a:solidFill>
+          <a:schemeClr val="bg1">
+            <a:lumMod val="85000"/>
+          </a:schemeClr>
+        </a:solidFill>
+        <a:effectLst/>
+      </p:bgPr>
+    </p:bg>
     <p:spTree>
       <p:nvGrpSpPr>
         <p:cNvPr id="1" name=""/>
@@ -3982,7 +4593,7 @@
           </a:prstGeom>
           <a:extLst>
             <a:ext uri="{C572A759-6A51-4108-AA02-DFA0A04FC94B}">
-              <ma14:wrappingTextBoxFlag xmlns:ma14="http://schemas.microsoft.com/office/mac/drawingml/2011/main" xmlns:a14="http://schemas.microsoft.com/office/drawing/2010/main" xmlns:m="http://schemas.openxmlformats.org/officeDocument/2006/math" xmlns="" val="1"/>
+              <ma14:wrappingTextBoxFlag xmlns="" xmlns:m="http://schemas.openxmlformats.org/officeDocument/2006/math" xmlns:a14="http://schemas.microsoft.com/office/drawing/2010/main" xmlns:ma14="http://schemas.microsoft.com/office/mac/drawingml/2011/main" val="1"/>
             </a:ext>
           </a:extLst>
         </p:spPr>
@@ -4369,6 +4980,16 @@
 <file path=ppt/slides/slide12.xml><?xml version="1.0" encoding="utf-8"?>
 <p:sld xmlns:a="http://schemas.openxmlformats.org/drawingml/2006/main" xmlns:r="http://schemas.openxmlformats.org/officeDocument/2006/relationships" xmlns:p="http://schemas.openxmlformats.org/presentationml/2006/main">
   <p:cSld>
+    <p:bg>
+      <p:bgPr>
+        <a:solidFill>
+          <a:schemeClr val="bg1">
+            <a:lumMod val="85000"/>
+          </a:schemeClr>
+        </a:solidFill>
+        <a:effectLst/>
+      </p:bgPr>
+    </p:bg>
     <p:spTree>
       <p:nvGrpSpPr>
         <p:cNvPr id="1" name=""/>
@@ -4512,7 +5133,7 @@
           </a:prstGeom>
           <a:extLst>
             <a:ext uri="{C572A759-6A51-4108-AA02-DFA0A04FC94B}">
-              <ma14:wrappingTextBoxFlag xmlns:ma14="http://schemas.microsoft.com/office/mac/drawingml/2011/main" xmlns:a14="http://schemas.microsoft.com/office/drawing/2010/main" xmlns:m="http://schemas.openxmlformats.org/officeDocument/2006/math" xmlns="" val="1"/>
+              <ma14:wrappingTextBoxFlag xmlns="" xmlns:m="http://schemas.openxmlformats.org/officeDocument/2006/math" xmlns:a14="http://schemas.microsoft.com/office/drawing/2010/main" xmlns:ma14="http://schemas.microsoft.com/office/mac/drawingml/2011/main" val="1"/>
             </a:ext>
           </a:extLst>
         </p:spPr>
@@ -4539,6 +5160,16 @@
 <file path=ppt/slides/slide13.xml><?xml version="1.0" encoding="utf-8"?>
 <p:sld xmlns:a="http://schemas.openxmlformats.org/drawingml/2006/main" xmlns:r="http://schemas.openxmlformats.org/officeDocument/2006/relationships" xmlns:p="http://schemas.openxmlformats.org/presentationml/2006/main">
   <p:cSld>
+    <p:bg>
+      <p:bgPr>
+        <a:solidFill>
+          <a:schemeClr val="bg1">
+            <a:lumMod val="85000"/>
+          </a:schemeClr>
+        </a:solidFill>
+        <a:effectLst/>
+      </p:bgPr>
+    </p:bg>
     <p:spTree>
       <p:nvGrpSpPr>
         <p:cNvPr id="1" name=""/>
@@ -4573,7 +5204,7 @@
           </a:prstGeom>
           <a:extLst>
             <a:ext uri="{C572A759-6A51-4108-AA02-DFA0A04FC94B}">
-              <ma14:wrappingTextBoxFlag xmlns:ma14="http://schemas.microsoft.com/office/mac/drawingml/2011/main" xmlns:a14="http://schemas.microsoft.com/office/drawing/2010/main" xmlns:m="http://schemas.openxmlformats.org/officeDocument/2006/math" xmlns="" val="1"/>
+              <ma14:wrappingTextBoxFlag xmlns="" xmlns:m="http://schemas.openxmlformats.org/officeDocument/2006/math" xmlns:a14="http://schemas.microsoft.com/office/drawing/2010/main" xmlns:ma14="http://schemas.microsoft.com/office/mac/drawingml/2011/main" val="1"/>
             </a:ext>
           </a:extLst>
         </p:spPr>
@@ -4741,6 +5372,16 @@
 <file path=ppt/slides/slide14.xml><?xml version="1.0" encoding="utf-8"?>
 <p:sld xmlns:a="http://schemas.openxmlformats.org/drawingml/2006/main" xmlns:r="http://schemas.openxmlformats.org/officeDocument/2006/relationships" xmlns:p="http://schemas.openxmlformats.org/presentationml/2006/main">
   <p:cSld>
+    <p:bg>
+      <p:bgPr>
+        <a:solidFill>
+          <a:schemeClr val="bg1">
+            <a:lumMod val="85000"/>
+          </a:schemeClr>
+        </a:solidFill>
+        <a:effectLst/>
+      </p:bgPr>
+    </p:bg>
     <p:spTree>
       <p:nvGrpSpPr>
         <p:cNvPr id="1" name=""/>
@@ -4775,7 +5416,7 @@
           </a:prstGeom>
           <a:extLst>
             <a:ext uri="{C572A759-6A51-4108-AA02-DFA0A04FC94B}">
-              <ma14:wrappingTextBoxFlag xmlns:ma14="http://schemas.microsoft.com/office/mac/drawingml/2011/main" xmlns:a14="http://schemas.microsoft.com/office/drawing/2010/main" xmlns:m="http://schemas.openxmlformats.org/officeDocument/2006/math" xmlns="" val="1"/>
+              <ma14:wrappingTextBoxFlag xmlns="" xmlns:m="http://schemas.openxmlformats.org/officeDocument/2006/math" xmlns:a14="http://schemas.microsoft.com/office/drawing/2010/main" xmlns:ma14="http://schemas.microsoft.com/office/mac/drawingml/2011/main" val="1"/>
             </a:ext>
           </a:extLst>
         </p:spPr>
@@ -4858,6 +5499,16 @@
 <file path=ppt/slides/slide15.xml><?xml version="1.0" encoding="utf-8"?>
 <p:sld xmlns:a="http://schemas.openxmlformats.org/drawingml/2006/main" xmlns:r="http://schemas.openxmlformats.org/officeDocument/2006/relationships" xmlns:p="http://schemas.openxmlformats.org/presentationml/2006/main">
   <p:cSld>
+    <p:bg>
+      <p:bgPr>
+        <a:solidFill>
+          <a:schemeClr val="bg1">
+            <a:lumMod val="85000"/>
+          </a:schemeClr>
+        </a:solidFill>
+        <a:effectLst/>
+      </p:bgPr>
+    </p:bg>
     <p:spTree>
       <p:nvGrpSpPr>
         <p:cNvPr id="1" name=""/>
@@ -4966,7 +5617,7 @@
           </a:prstGeom>
           <a:extLst>
             <a:ext uri="{C572A759-6A51-4108-AA02-DFA0A04FC94B}">
-              <ma14:wrappingTextBoxFlag xmlns:ma14="http://schemas.microsoft.com/office/mac/drawingml/2011/main" xmlns:a14="http://schemas.microsoft.com/office/drawing/2010/main" xmlns:m="http://schemas.openxmlformats.org/officeDocument/2006/math" xmlns="" val="1"/>
+              <ma14:wrappingTextBoxFlag xmlns="" xmlns:m="http://schemas.openxmlformats.org/officeDocument/2006/math" xmlns:a14="http://schemas.microsoft.com/office/drawing/2010/main" xmlns:ma14="http://schemas.microsoft.com/office/mac/drawingml/2011/main" val="1"/>
             </a:ext>
           </a:extLst>
         </p:spPr>
@@ -5232,6 +5883,16 @@
 <file path=ppt/slides/slide16.xml><?xml version="1.0" encoding="utf-8"?>
 <p:sld xmlns:a="http://schemas.openxmlformats.org/drawingml/2006/main" xmlns:r="http://schemas.openxmlformats.org/officeDocument/2006/relationships" xmlns:p="http://schemas.openxmlformats.org/presentationml/2006/main">
   <p:cSld>
+    <p:bg>
+      <p:bgPr>
+        <a:solidFill>
+          <a:schemeClr val="bg1">
+            <a:lumMod val="85000"/>
+          </a:schemeClr>
+        </a:solidFill>
+        <a:effectLst/>
+      </p:bgPr>
+    </p:bg>
     <p:spTree>
       <p:nvGrpSpPr>
         <p:cNvPr id="1" name=""/>
@@ -5375,7 +6036,7 @@
           </a:prstGeom>
           <a:extLst>
             <a:ext uri="{C572A759-6A51-4108-AA02-DFA0A04FC94B}">
-              <ma14:wrappingTextBoxFlag xmlns:ma14="http://schemas.microsoft.com/office/mac/drawingml/2011/main" xmlns:a14="http://schemas.microsoft.com/office/drawing/2010/main" xmlns:m="http://schemas.openxmlformats.org/officeDocument/2006/math" xmlns="" val="1"/>
+              <ma14:wrappingTextBoxFlag xmlns="" xmlns:m="http://schemas.openxmlformats.org/officeDocument/2006/math" xmlns:a14="http://schemas.microsoft.com/office/drawing/2010/main" xmlns:ma14="http://schemas.microsoft.com/office/mac/drawingml/2011/main" val="1"/>
             </a:ext>
           </a:extLst>
         </p:spPr>
@@ -5631,6 +6292,16 @@
 <file path=ppt/slides/slide17.xml><?xml version="1.0" encoding="utf-8"?>
 <p:sld xmlns:a="http://schemas.openxmlformats.org/drawingml/2006/main" xmlns:r="http://schemas.openxmlformats.org/officeDocument/2006/relationships" xmlns:p="http://schemas.openxmlformats.org/presentationml/2006/main">
   <p:cSld>
+    <p:bg>
+      <p:bgPr>
+        <a:solidFill>
+          <a:schemeClr val="bg1">
+            <a:lumMod val="85000"/>
+          </a:schemeClr>
+        </a:solidFill>
+        <a:effectLst/>
+      </p:bgPr>
+    </p:bg>
     <p:spTree>
       <p:nvGrpSpPr>
         <p:cNvPr id="1" name=""/>
@@ -5689,7 +6360,7 @@
         </p:spPr>
         <p:txBody>
           <a:bodyPr>
-            <a:normAutofit fontScale="55000" lnSpcReduction="20000"/>
+            <a:normAutofit fontScale="47500" lnSpcReduction="20000"/>
           </a:bodyPr>
           <a:lstStyle/>
           <a:p>
@@ -5808,7 +6479,7 @@
           </a:prstGeom>
           <a:extLst>
             <a:ext uri="{C572A759-6A51-4108-AA02-DFA0A04FC94B}">
-              <ma14:wrappingTextBoxFlag xmlns:ma14="http://schemas.microsoft.com/office/mac/drawingml/2011/main" xmlns:a14="http://schemas.microsoft.com/office/drawing/2010/main" xmlns:m="http://schemas.openxmlformats.org/officeDocument/2006/math" xmlns="" val="1"/>
+              <ma14:wrappingTextBoxFlag xmlns="" xmlns:m="http://schemas.openxmlformats.org/officeDocument/2006/math" xmlns:a14="http://schemas.microsoft.com/office/drawing/2010/main" xmlns:ma14="http://schemas.microsoft.com/office/mac/drawingml/2011/main" val="1"/>
             </a:ext>
           </a:extLst>
         </p:spPr>
@@ -6553,6 +7224,16 @@
 <file path=ppt/slides/slide18.xml><?xml version="1.0" encoding="utf-8"?>
 <p:sld xmlns:a="http://schemas.openxmlformats.org/drawingml/2006/main" xmlns:r="http://schemas.openxmlformats.org/officeDocument/2006/relationships" xmlns:p="http://schemas.openxmlformats.org/presentationml/2006/main">
   <p:cSld>
+    <p:bg>
+      <p:bgPr>
+        <a:solidFill>
+          <a:schemeClr val="bg1">
+            <a:lumMod val="85000"/>
+          </a:schemeClr>
+        </a:solidFill>
+        <a:effectLst/>
+      </p:bgPr>
+    </p:bg>
     <p:spTree>
       <p:nvGrpSpPr>
         <p:cNvPr id="1" name=""/>
@@ -6611,7 +7292,7 @@
         </p:spPr>
         <p:txBody>
           <a:bodyPr>
-            <a:normAutofit fontScale="62500" lnSpcReduction="20000"/>
+            <a:normAutofit fontScale="55000" lnSpcReduction="20000"/>
           </a:bodyPr>
           <a:lstStyle/>
           <a:p>
@@ -6709,7 +7390,7 @@
           </a:prstGeom>
           <a:extLst>
             <a:ext uri="{C572A759-6A51-4108-AA02-DFA0A04FC94B}">
-              <ma14:wrappingTextBoxFlag xmlns:ma14="http://schemas.microsoft.com/office/mac/drawingml/2011/main" xmlns:a14="http://schemas.microsoft.com/office/drawing/2010/main" xmlns:m="http://schemas.openxmlformats.org/officeDocument/2006/math" xmlns="" val="1"/>
+              <ma14:wrappingTextBoxFlag xmlns="" xmlns:m="http://schemas.openxmlformats.org/officeDocument/2006/math" xmlns:a14="http://schemas.microsoft.com/office/drawing/2010/main" xmlns:ma14="http://schemas.microsoft.com/office/mac/drawingml/2011/main" val="1"/>
             </a:ext>
           </a:extLst>
         </p:spPr>
@@ -7351,6 +8032,16 @@
 <file path=ppt/slides/slide19.xml><?xml version="1.0" encoding="utf-8"?>
 <p:sld xmlns:a="http://schemas.openxmlformats.org/drawingml/2006/main" xmlns:r="http://schemas.openxmlformats.org/officeDocument/2006/relationships" xmlns:p="http://schemas.openxmlformats.org/presentationml/2006/main">
   <p:cSld>
+    <p:bg>
+      <p:bgPr>
+        <a:solidFill>
+          <a:schemeClr val="bg1">
+            <a:lumMod val="85000"/>
+          </a:schemeClr>
+        </a:solidFill>
+        <a:effectLst/>
+      </p:bgPr>
+    </p:bg>
     <p:spTree>
       <p:nvGrpSpPr>
         <p:cNvPr id="1" name=""/>
@@ -7446,7 +8137,7 @@
           </a:prstGeom>
           <a:extLst>
             <a:ext uri="{C572A759-6A51-4108-AA02-DFA0A04FC94B}">
-              <ma14:wrappingTextBoxFlag xmlns:ma14="http://schemas.microsoft.com/office/mac/drawingml/2011/main" xmlns:a14="http://schemas.microsoft.com/office/drawing/2010/main" xmlns:m="http://schemas.openxmlformats.org/officeDocument/2006/math" xmlns="" val="1"/>
+              <ma14:wrappingTextBoxFlag xmlns="" xmlns:m="http://schemas.openxmlformats.org/officeDocument/2006/math" xmlns:a14="http://schemas.microsoft.com/office/drawing/2010/main" xmlns:ma14="http://schemas.microsoft.com/office/mac/drawingml/2011/main" val="1"/>
             </a:ext>
           </a:extLst>
         </p:spPr>
@@ -7736,6 +8427,16 @@
 <file path=ppt/slides/slide2.xml><?xml version="1.0" encoding="utf-8"?>
 <p:sld xmlns:a="http://schemas.openxmlformats.org/drawingml/2006/main" xmlns:r="http://schemas.openxmlformats.org/officeDocument/2006/relationships" xmlns:p="http://schemas.openxmlformats.org/presentationml/2006/main">
   <p:cSld>
+    <p:bg>
+      <p:bgPr>
+        <a:solidFill>
+          <a:schemeClr val="bg1">
+            <a:lumMod val="85000"/>
+          </a:schemeClr>
+        </a:solidFill>
+        <a:effectLst/>
+      </p:bgPr>
+    </p:bg>
     <p:spTree>
       <p:nvGrpSpPr>
         <p:cNvPr id="1" name=""/>
@@ -7832,7 +8533,7 @@
           </a:prstGeom>
           <a:extLst>
             <a:ext uri="{C572A759-6A51-4108-AA02-DFA0A04FC94B}">
-              <ma14:wrappingTextBoxFlag xmlns:ma14="http://schemas.microsoft.com/office/mac/drawingml/2011/main" xmlns:a14="http://schemas.microsoft.com/office/drawing/2010/main" xmlns:m="http://schemas.openxmlformats.org/officeDocument/2006/math" xmlns="" val="1"/>
+              <ma14:wrappingTextBoxFlag xmlns="" xmlns:m="http://schemas.openxmlformats.org/officeDocument/2006/math" xmlns:a14="http://schemas.microsoft.com/office/drawing/2010/main" xmlns:ma14="http://schemas.microsoft.com/office/mac/drawingml/2011/main" val="1"/>
             </a:ext>
           </a:extLst>
         </p:spPr>
@@ -7859,6 +8560,16 @@
 <file path=ppt/slides/slide20.xml><?xml version="1.0" encoding="utf-8"?>
 <p:sld xmlns:a="http://schemas.openxmlformats.org/drawingml/2006/main" xmlns:r="http://schemas.openxmlformats.org/officeDocument/2006/relationships" xmlns:p="http://schemas.openxmlformats.org/presentationml/2006/main">
   <p:cSld>
+    <p:bg>
+      <p:bgPr>
+        <a:solidFill>
+          <a:schemeClr val="bg1">
+            <a:lumMod val="85000"/>
+          </a:schemeClr>
+        </a:solidFill>
+        <a:effectLst/>
+      </p:bgPr>
+    </p:bg>
     <p:spTree>
       <p:nvGrpSpPr>
         <p:cNvPr id="1" name=""/>
@@ -7952,6 +8663,16 @@
 <file path=ppt/slides/slide3.xml><?xml version="1.0" encoding="utf-8"?>
 <p:sld xmlns:a="http://schemas.openxmlformats.org/drawingml/2006/main" xmlns:r="http://schemas.openxmlformats.org/officeDocument/2006/relationships" xmlns:p="http://schemas.openxmlformats.org/presentationml/2006/main">
   <p:cSld>
+    <p:bg>
+      <p:bgPr>
+        <a:solidFill>
+          <a:schemeClr val="bg1">
+            <a:lumMod val="85000"/>
+          </a:schemeClr>
+        </a:solidFill>
+        <a:effectLst/>
+      </p:bgPr>
+    </p:bg>
     <p:spTree>
       <p:nvGrpSpPr>
         <p:cNvPr id="1" name=""/>
@@ -8051,7 +8772,7 @@
           </a:prstGeom>
           <a:extLst>
             <a:ext uri="{C572A759-6A51-4108-AA02-DFA0A04FC94B}">
-              <ma14:wrappingTextBoxFlag xmlns:ma14="http://schemas.microsoft.com/office/mac/drawingml/2011/main" xmlns:a14="http://schemas.microsoft.com/office/drawing/2010/main" xmlns:m="http://schemas.openxmlformats.org/officeDocument/2006/math" xmlns="" val="1"/>
+              <ma14:wrappingTextBoxFlag xmlns="" xmlns:m="http://schemas.openxmlformats.org/officeDocument/2006/math" xmlns:a14="http://schemas.microsoft.com/office/drawing/2010/main" xmlns:ma14="http://schemas.microsoft.com/office/mac/drawingml/2011/main" val="1"/>
             </a:ext>
           </a:extLst>
         </p:spPr>
@@ -8095,7 +8816,7 @@
           </a:ln>
           <a:extLst>
             <a:ext uri="{C572A759-6A51-4108-AA02-DFA0A04FC94B}">
-              <ma14:wrappingTextBoxFlag xmlns:ma14="http://schemas.microsoft.com/office/mac/drawingml/2011/main" xmlns:a14="http://schemas.microsoft.com/office/drawing/2010/main" xmlns:m="http://schemas.openxmlformats.org/officeDocument/2006/math" xmlns="" val="1"/>
+              <ma14:wrappingTextBoxFlag xmlns="" xmlns:m="http://schemas.openxmlformats.org/officeDocument/2006/math" xmlns:a14="http://schemas.microsoft.com/office/drawing/2010/main" xmlns:ma14="http://schemas.microsoft.com/office/mac/drawingml/2011/main" val="1"/>
             </a:ext>
           </a:extLst>
         </p:spPr>
@@ -8143,7 +8864,7 @@
           </a:ln>
           <a:extLst>
             <a:ext uri="{C572A759-6A51-4108-AA02-DFA0A04FC94B}">
-              <ma14:wrappingTextBoxFlag xmlns:ma14="http://schemas.microsoft.com/office/mac/drawingml/2011/main" xmlns:a14="http://schemas.microsoft.com/office/drawing/2010/main" xmlns:m="http://schemas.openxmlformats.org/officeDocument/2006/math" xmlns="" val="1"/>
+              <ma14:wrappingTextBoxFlag xmlns="" xmlns:m="http://schemas.openxmlformats.org/officeDocument/2006/math" xmlns:a14="http://schemas.microsoft.com/office/drawing/2010/main" xmlns:ma14="http://schemas.microsoft.com/office/mac/drawingml/2011/main" val="1"/>
             </a:ext>
           </a:extLst>
         </p:spPr>
@@ -8191,7 +8912,7 @@
           </a:ln>
           <a:extLst>
             <a:ext uri="{C572A759-6A51-4108-AA02-DFA0A04FC94B}">
-              <ma14:wrappingTextBoxFlag xmlns:ma14="http://schemas.microsoft.com/office/mac/drawingml/2011/main" xmlns:a14="http://schemas.microsoft.com/office/drawing/2010/main" xmlns:m="http://schemas.openxmlformats.org/officeDocument/2006/math" xmlns="" val="1"/>
+              <ma14:wrappingTextBoxFlag xmlns="" xmlns:m="http://schemas.openxmlformats.org/officeDocument/2006/math" xmlns:a14="http://schemas.microsoft.com/office/drawing/2010/main" xmlns:ma14="http://schemas.microsoft.com/office/mac/drawingml/2011/main" val="1"/>
             </a:ext>
           </a:extLst>
         </p:spPr>
@@ -8239,7 +8960,7 @@
           </a:ln>
           <a:extLst>
             <a:ext uri="{C572A759-6A51-4108-AA02-DFA0A04FC94B}">
-              <ma14:wrappingTextBoxFlag xmlns:ma14="http://schemas.microsoft.com/office/mac/drawingml/2011/main" xmlns:a14="http://schemas.microsoft.com/office/drawing/2010/main" xmlns:m="http://schemas.openxmlformats.org/officeDocument/2006/math" xmlns="" val="1"/>
+              <ma14:wrappingTextBoxFlag xmlns="" xmlns:m="http://schemas.openxmlformats.org/officeDocument/2006/math" xmlns:a14="http://schemas.microsoft.com/office/drawing/2010/main" xmlns:ma14="http://schemas.microsoft.com/office/mac/drawingml/2011/main" val="1"/>
             </a:ext>
           </a:extLst>
         </p:spPr>
@@ -8287,7 +9008,7 @@
           </a:ln>
           <a:extLst>
             <a:ext uri="{C572A759-6A51-4108-AA02-DFA0A04FC94B}">
-              <ma14:wrappingTextBoxFlag xmlns:ma14="http://schemas.microsoft.com/office/mac/drawingml/2011/main" xmlns:a14="http://schemas.microsoft.com/office/drawing/2010/main" xmlns:m="http://schemas.openxmlformats.org/officeDocument/2006/math" xmlns="" val="1"/>
+              <ma14:wrappingTextBoxFlag xmlns="" xmlns:m="http://schemas.openxmlformats.org/officeDocument/2006/math" xmlns:a14="http://schemas.microsoft.com/office/drawing/2010/main" xmlns:ma14="http://schemas.microsoft.com/office/mac/drawingml/2011/main" val="1"/>
             </a:ext>
           </a:extLst>
         </p:spPr>
@@ -8335,7 +9056,7 @@
           </a:ln>
           <a:extLst>
             <a:ext uri="{C572A759-6A51-4108-AA02-DFA0A04FC94B}">
-              <ma14:wrappingTextBoxFlag xmlns:ma14="http://schemas.microsoft.com/office/mac/drawingml/2011/main" xmlns:a14="http://schemas.microsoft.com/office/drawing/2010/main" xmlns:m="http://schemas.openxmlformats.org/officeDocument/2006/math" xmlns="" val="1"/>
+              <ma14:wrappingTextBoxFlag xmlns="" xmlns:m="http://schemas.openxmlformats.org/officeDocument/2006/math" xmlns:a14="http://schemas.microsoft.com/office/drawing/2010/main" xmlns:ma14="http://schemas.microsoft.com/office/mac/drawingml/2011/main" val="1"/>
             </a:ext>
           </a:extLst>
         </p:spPr>
@@ -8383,7 +9104,7 @@
           </a:ln>
           <a:extLst>
             <a:ext uri="{C572A759-6A51-4108-AA02-DFA0A04FC94B}">
-              <ma14:wrappingTextBoxFlag xmlns:ma14="http://schemas.microsoft.com/office/mac/drawingml/2011/main" xmlns:a14="http://schemas.microsoft.com/office/drawing/2010/main" xmlns:m="http://schemas.openxmlformats.org/officeDocument/2006/math" xmlns="" val="1"/>
+              <ma14:wrappingTextBoxFlag xmlns="" xmlns:m="http://schemas.openxmlformats.org/officeDocument/2006/math" xmlns:a14="http://schemas.microsoft.com/office/drawing/2010/main" xmlns:ma14="http://schemas.microsoft.com/office/mac/drawingml/2011/main" val="1"/>
             </a:ext>
           </a:extLst>
         </p:spPr>
@@ -8431,7 +9152,7 @@
           </a:ln>
           <a:extLst>
             <a:ext uri="{C572A759-6A51-4108-AA02-DFA0A04FC94B}">
-              <ma14:wrappingTextBoxFlag xmlns:ma14="http://schemas.microsoft.com/office/mac/drawingml/2011/main" xmlns:a14="http://schemas.microsoft.com/office/drawing/2010/main" xmlns:m="http://schemas.openxmlformats.org/officeDocument/2006/math" xmlns="" val="1"/>
+              <ma14:wrappingTextBoxFlag xmlns="" xmlns:m="http://schemas.openxmlformats.org/officeDocument/2006/math" xmlns:a14="http://schemas.microsoft.com/office/drawing/2010/main" xmlns:ma14="http://schemas.microsoft.com/office/mac/drawingml/2011/main" val="1"/>
             </a:ext>
           </a:extLst>
         </p:spPr>
@@ -8479,7 +9200,7 @@
           </a:ln>
           <a:extLst>
             <a:ext uri="{C572A759-6A51-4108-AA02-DFA0A04FC94B}">
-              <ma14:wrappingTextBoxFlag xmlns:ma14="http://schemas.microsoft.com/office/mac/drawingml/2011/main" xmlns:a14="http://schemas.microsoft.com/office/drawing/2010/main" xmlns:m="http://schemas.openxmlformats.org/officeDocument/2006/math" xmlns="" val="1"/>
+              <ma14:wrappingTextBoxFlag xmlns="" xmlns:m="http://schemas.openxmlformats.org/officeDocument/2006/math" xmlns:a14="http://schemas.microsoft.com/office/drawing/2010/main" xmlns:ma14="http://schemas.microsoft.com/office/mac/drawingml/2011/main" val="1"/>
             </a:ext>
           </a:extLst>
         </p:spPr>
@@ -8527,7 +9248,7 @@
           </a:ln>
           <a:extLst>
             <a:ext uri="{C572A759-6A51-4108-AA02-DFA0A04FC94B}">
-              <ma14:wrappingTextBoxFlag xmlns:ma14="http://schemas.microsoft.com/office/mac/drawingml/2011/main" xmlns:a14="http://schemas.microsoft.com/office/drawing/2010/main" xmlns:m="http://schemas.openxmlformats.org/officeDocument/2006/math" xmlns="" val="1"/>
+              <ma14:wrappingTextBoxFlag xmlns="" xmlns:m="http://schemas.openxmlformats.org/officeDocument/2006/math" xmlns:a14="http://schemas.microsoft.com/office/drawing/2010/main" xmlns:ma14="http://schemas.microsoft.com/office/mac/drawingml/2011/main" val="1"/>
             </a:ext>
           </a:extLst>
         </p:spPr>
@@ -8575,7 +9296,7 @@
           </a:ln>
           <a:extLst>
             <a:ext uri="{C572A759-6A51-4108-AA02-DFA0A04FC94B}">
-              <ma14:wrappingTextBoxFlag xmlns:ma14="http://schemas.microsoft.com/office/mac/drawingml/2011/main" xmlns:a14="http://schemas.microsoft.com/office/drawing/2010/main" xmlns:m="http://schemas.openxmlformats.org/officeDocument/2006/math" xmlns="" val="1"/>
+              <ma14:wrappingTextBoxFlag xmlns="" xmlns:m="http://schemas.openxmlformats.org/officeDocument/2006/math" xmlns:a14="http://schemas.microsoft.com/office/drawing/2010/main" xmlns:ma14="http://schemas.microsoft.com/office/mac/drawingml/2011/main" val="1"/>
             </a:ext>
           </a:extLst>
         </p:spPr>
@@ -8623,7 +9344,7 @@
           </a:ln>
           <a:extLst>
             <a:ext uri="{C572A759-6A51-4108-AA02-DFA0A04FC94B}">
-              <ma14:wrappingTextBoxFlag xmlns:ma14="http://schemas.microsoft.com/office/mac/drawingml/2011/main" xmlns:a14="http://schemas.microsoft.com/office/drawing/2010/main" xmlns:m="http://schemas.openxmlformats.org/officeDocument/2006/math" xmlns="" val="1"/>
+              <ma14:wrappingTextBoxFlag xmlns="" xmlns:m="http://schemas.openxmlformats.org/officeDocument/2006/math" xmlns:a14="http://schemas.microsoft.com/office/drawing/2010/main" xmlns:ma14="http://schemas.microsoft.com/office/mac/drawingml/2011/main" val="1"/>
             </a:ext>
           </a:extLst>
         </p:spPr>
@@ -8671,7 +9392,7 @@
           </a:ln>
           <a:extLst>
             <a:ext uri="{C572A759-6A51-4108-AA02-DFA0A04FC94B}">
-              <ma14:wrappingTextBoxFlag xmlns:ma14="http://schemas.microsoft.com/office/mac/drawingml/2011/main" xmlns:a14="http://schemas.microsoft.com/office/drawing/2010/main" xmlns:m="http://schemas.openxmlformats.org/officeDocument/2006/math" xmlns="" val="1"/>
+              <ma14:wrappingTextBoxFlag xmlns="" xmlns:m="http://schemas.openxmlformats.org/officeDocument/2006/math" xmlns:a14="http://schemas.microsoft.com/office/drawing/2010/main" xmlns:ma14="http://schemas.microsoft.com/office/mac/drawingml/2011/main" val="1"/>
             </a:ext>
           </a:extLst>
         </p:spPr>
@@ -8719,7 +9440,7 @@
           </a:ln>
           <a:extLst>
             <a:ext uri="{C572A759-6A51-4108-AA02-DFA0A04FC94B}">
-              <ma14:wrappingTextBoxFlag xmlns:ma14="http://schemas.microsoft.com/office/mac/drawingml/2011/main" xmlns:a14="http://schemas.microsoft.com/office/drawing/2010/main" xmlns:m="http://schemas.openxmlformats.org/officeDocument/2006/math" xmlns="" val="1"/>
+              <ma14:wrappingTextBoxFlag xmlns="" xmlns:m="http://schemas.openxmlformats.org/officeDocument/2006/math" xmlns:a14="http://schemas.microsoft.com/office/drawing/2010/main" xmlns:ma14="http://schemas.microsoft.com/office/mac/drawingml/2011/main" val="1"/>
             </a:ext>
           </a:extLst>
         </p:spPr>
@@ -8767,7 +9488,7 @@
           </a:ln>
           <a:extLst>
             <a:ext uri="{C572A759-6A51-4108-AA02-DFA0A04FC94B}">
-              <ma14:wrappingTextBoxFlag xmlns:ma14="http://schemas.microsoft.com/office/mac/drawingml/2011/main" xmlns:a14="http://schemas.microsoft.com/office/drawing/2010/main" xmlns:m="http://schemas.openxmlformats.org/officeDocument/2006/math" xmlns="" val="1"/>
+              <ma14:wrappingTextBoxFlag xmlns="" xmlns:m="http://schemas.openxmlformats.org/officeDocument/2006/math" xmlns:a14="http://schemas.microsoft.com/office/drawing/2010/main" xmlns:ma14="http://schemas.microsoft.com/office/mac/drawingml/2011/main" val="1"/>
             </a:ext>
           </a:extLst>
         </p:spPr>
@@ -8815,7 +9536,7 @@
           </a:ln>
           <a:extLst>
             <a:ext uri="{C572A759-6A51-4108-AA02-DFA0A04FC94B}">
-              <ma14:wrappingTextBoxFlag xmlns:ma14="http://schemas.microsoft.com/office/mac/drawingml/2011/main" xmlns:a14="http://schemas.microsoft.com/office/drawing/2010/main" xmlns:m="http://schemas.openxmlformats.org/officeDocument/2006/math" xmlns="" val="1"/>
+              <ma14:wrappingTextBoxFlag xmlns="" xmlns:m="http://schemas.openxmlformats.org/officeDocument/2006/math" xmlns:a14="http://schemas.microsoft.com/office/drawing/2010/main" xmlns:ma14="http://schemas.microsoft.com/office/mac/drawingml/2011/main" val="1"/>
             </a:ext>
           </a:extLst>
         </p:spPr>
@@ -9344,22 +10065,22 @@
     </p:tnLst>
     <p:bldLst>
       <p:bldP spid="84" grpId="0" build="p"/>
-      <p:bldP spid="85" grpId="0"/>
-      <p:bldP spid="86" grpId="0"/>
-      <p:bldP spid="87" grpId="0"/>
-      <p:bldP spid="88" grpId="0"/>
-      <p:bldP spid="89" grpId="0"/>
-      <p:bldP spid="90" grpId="0"/>
-      <p:bldP spid="91" grpId="0"/>
-      <p:bldP spid="92" grpId="0"/>
-      <p:bldP spid="93" grpId="0"/>
-      <p:bldP spid="94" grpId="0"/>
-      <p:bldP spid="95" grpId="0"/>
-      <p:bldP spid="96" grpId="0"/>
-      <p:bldP spid="97" grpId="0"/>
-      <p:bldP spid="98" grpId="0"/>
-      <p:bldP spid="99" grpId="0"/>
-      <p:bldP spid="100" grpId="0"/>
+      <p:bldP spid="85" grpId="0" animBg="1"/>
+      <p:bldP spid="86" grpId="0" animBg="1"/>
+      <p:bldP spid="87" grpId="0" animBg="1"/>
+      <p:bldP spid="88" grpId="0" animBg="1"/>
+      <p:bldP spid="89" grpId="0" animBg="1"/>
+      <p:bldP spid="90" grpId="0" animBg="1"/>
+      <p:bldP spid="91" grpId="0" animBg="1"/>
+      <p:bldP spid="92" grpId="0" animBg="1"/>
+      <p:bldP spid="93" grpId="0" animBg="1"/>
+      <p:bldP spid="94" grpId="0" animBg="1"/>
+      <p:bldP spid="95" grpId="0" animBg="1"/>
+      <p:bldP spid="96" grpId="0" animBg="1"/>
+      <p:bldP spid="97" grpId="0" animBg="1"/>
+      <p:bldP spid="98" grpId="0" animBg="1"/>
+      <p:bldP spid="99" grpId="0" animBg="1"/>
+      <p:bldP spid="100" grpId="0" animBg="1"/>
     </p:bldLst>
   </p:timing>
 </p:sld>
@@ -9368,6 +10089,16 @@
 <file path=ppt/slides/slide4.xml><?xml version="1.0" encoding="utf-8"?>
 <p:sld xmlns:a="http://schemas.openxmlformats.org/drawingml/2006/main" xmlns:r="http://schemas.openxmlformats.org/officeDocument/2006/relationships" xmlns:p="http://schemas.openxmlformats.org/presentationml/2006/main">
   <p:cSld>
+    <p:bg>
+      <p:bgPr>
+        <a:solidFill>
+          <a:schemeClr val="bg1">
+            <a:lumMod val="85000"/>
+          </a:schemeClr>
+        </a:solidFill>
+        <a:effectLst/>
+      </p:bgPr>
+    </p:bg>
     <p:spTree>
       <p:nvGrpSpPr>
         <p:cNvPr id="1" name=""/>
@@ -9467,7 +10198,7 @@
           </a:prstGeom>
           <a:extLst>
             <a:ext uri="{C572A759-6A51-4108-AA02-DFA0A04FC94B}">
-              <ma14:wrappingTextBoxFlag xmlns:ma14="http://schemas.microsoft.com/office/mac/drawingml/2011/main" xmlns:a14="http://schemas.microsoft.com/office/drawing/2010/main" xmlns:m="http://schemas.openxmlformats.org/officeDocument/2006/math" xmlns="" val="1"/>
+              <ma14:wrappingTextBoxFlag xmlns="" xmlns:m="http://schemas.openxmlformats.org/officeDocument/2006/math" xmlns:a14="http://schemas.microsoft.com/office/drawing/2010/main" xmlns:ma14="http://schemas.microsoft.com/office/mac/drawingml/2011/main" val="1"/>
             </a:ext>
           </a:extLst>
         </p:spPr>
@@ -9872,6 +10603,16 @@
 <file path=ppt/slides/slide5.xml><?xml version="1.0" encoding="utf-8"?>
 <p:sld xmlns:a="http://schemas.openxmlformats.org/drawingml/2006/main" xmlns:r="http://schemas.openxmlformats.org/officeDocument/2006/relationships" xmlns:p="http://schemas.openxmlformats.org/presentationml/2006/main">
   <p:cSld>
+    <p:bg>
+      <p:bgPr>
+        <a:solidFill>
+          <a:schemeClr val="bg1">
+            <a:lumMod val="85000"/>
+          </a:schemeClr>
+        </a:solidFill>
+        <a:effectLst/>
+      </p:bgPr>
+    </p:bg>
     <p:spTree>
       <p:nvGrpSpPr>
         <p:cNvPr id="1" name=""/>
@@ -9906,7 +10647,7 @@
           </a:prstGeom>
           <a:extLst>
             <a:ext uri="{C572A759-6A51-4108-AA02-DFA0A04FC94B}">
-              <ma14:wrappingTextBoxFlag xmlns:ma14="http://schemas.microsoft.com/office/mac/drawingml/2011/main" xmlns:a14="http://schemas.microsoft.com/office/drawing/2010/main" xmlns:m="http://schemas.openxmlformats.org/officeDocument/2006/math" xmlns="" val="1"/>
+              <ma14:wrappingTextBoxFlag xmlns="" xmlns:m="http://schemas.openxmlformats.org/officeDocument/2006/math" xmlns:a14="http://schemas.microsoft.com/office/drawing/2010/main" xmlns:ma14="http://schemas.microsoft.com/office/mac/drawingml/2011/main" val="1"/>
             </a:ext>
           </a:extLst>
         </p:spPr>
@@ -9971,7 +10712,7 @@
           </a:ln>
           <a:extLst>
             <a:ext uri="{C572A759-6A51-4108-AA02-DFA0A04FC94B}">
-              <ma14:wrappingTextBoxFlag xmlns:ma14="http://schemas.microsoft.com/office/mac/drawingml/2011/main" xmlns:a14="http://schemas.microsoft.com/office/drawing/2010/main" xmlns:m="http://schemas.openxmlformats.org/officeDocument/2006/math" xmlns="" val="1"/>
+              <ma14:wrappingTextBoxFlag xmlns="" xmlns:m="http://schemas.openxmlformats.org/officeDocument/2006/math" xmlns:a14="http://schemas.microsoft.com/office/drawing/2010/main" xmlns:ma14="http://schemas.microsoft.com/office/mac/drawingml/2011/main" val="1"/>
             </a:ext>
           </a:extLst>
         </p:spPr>
@@ -10034,6 +10775,16 @@
 <file path=ppt/slides/slide6.xml><?xml version="1.0" encoding="utf-8"?>
 <p:sld xmlns:a="http://schemas.openxmlformats.org/drawingml/2006/main" xmlns:r="http://schemas.openxmlformats.org/officeDocument/2006/relationships" xmlns:p="http://schemas.openxmlformats.org/presentationml/2006/main">
   <p:cSld>
+    <p:bg>
+      <p:bgPr>
+        <a:solidFill>
+          <a:schemeClr val="bg1">
+            <a:lumMod val="85000"/>
+          </a:schemeClr>
+        </a:solidFill>
+        <a:effectLst/>
+      </p:bgPr>
+    </p:bg>
     <p:spTree>
       <p:nvGrpSpPr>
         <p:cNvPr id="1" name=""/>
@@ -10095,7 +10846,7 @@
         </p:spPr>
         <p:txBody>
           <a:bodyPr>
-            <a:normAutofit fontScale="62500" lnSpcReduction="20000"/>
+            <a:normAutofit fontScale="55000" lnSpcReduction="20000"/>
           </a:bodyPr>
           <a:lstStyle/>
           <a:p>
@@ -10226,7 +10977,7 @@
           </a:prstGeom>
           <a:extLst>
             <a:ext uri="{C572A759-6A51-4108-AA02-DFA0A04FC94B}">
-              <ma14:wrappingTextBoxFlag xmlns:ma14="http://schemas.microsoft.com/office/mac/drawingml/2011/main" xmlns:a14="http://schemas.microsoft.com/office/drawing/2010/main" xmlns:m="http://schemas.openxmlformats.org/officeDocument/2006/math" xmlns="" val="1"/>
+              <ma14:wrappingTextBoxFlag xmlns="" xmlns:m="http://schemas.openxmlformats.org/officeDocument/2006/math" xmlns:a14="http://schemas.microsoft.com/office/drawing/2010/main" xmlns:ma14="http://schemas.microsoft.com/office/mac/drawingml/2011/main" val="1"/>
             </a:ext>
           </a:extLst>
         </p:spPr>
@@ -10253,6 +11004,16 @@
 <file path=ppt/slides/slide7.xml><?xml version="1.0" encoding="utf-8"?>
 <p:sld xmlns:a="http://schemas.openxmlformats.org/drawingml/2006/main" xmlns:r="http://schemas.openxmlformats.org/officeDocument/2006/relationships" xmlns:p="http://schemas.openxmlformats.org/presentationml/2006/main">
   <p:cSld>
+    <p:bg>
+      <p:bgPr>
+        <a:solidFill>
+          <a:schemeClr val="bg1">
+            <a:lumMod val="85000"/>
+          </a:schemeClr>
+        </a:solidFill>
+        <a:effectLst/>
+      </p:bgPr>
+    </p:bg>
     <p:spTree>
       <p:nvGrpSpPr>
         <p:cNvPr id="1" name=""/>
@@ -10363,7 +11124,7 @@
           </a:prstGeom>
           <a:extLst>
             <a:ext uri="{C572A759-6A51-4108-AA02-DFA0A04FC94B}">
-              <ma14:wrappingTextBoxFlag xmlns:ma14="http://schemas.microsoft.com/office/mac/drawingml/2011/main" xmlns:a14="http://schemas.microsoft.com/office/drawing/2010/main" xmlns:m="http://schemas.openxmlformats.org/officeDocument/2006/math" xmlns="" val="1"/>
+              <ma14:wrappingTextBoxFlag xmlns="" xmlns:m="http://schemas.openxmlformats.org/officeDocument/2006/math" xmlns:a14="http://schemas.microsoft.com/office/drawing/2010/main" xmlns:ma14="http://schemas.microsoft.com/office/mac/drawingml/2011/main" val="1"/>
             </a:ext>
           </a:extLst>
         </p:spPr>
@@ -10390,6 +11151,16 @@
 <file path=ppt/slides/slide8.xml><?xml version="1.0" encoding="utf-8"?>
 <p:sld xmlns:a="http://schemas.openxmlformats.org/drawingml/2006/main" xmlns:r="http://schemas.openxmlformats.org/officeDocument/2006/relationships" xmlns:p="http://schemas.openxmlformats.org/presentationml/2006/main">
   <p:cSld>
+    <p:bg>
+      <p:bgPr>
+        <a:solidFill>
+          <a:schemeClr val="bg1">
+            <a:lumMod val="85000"/>
+          </a:schemeClr>
+        </a:solidFill>
+        <a:effectLst/>
+      </p:bgPr>
+    </p:bg>
     <p:spTree>
       <p:nvGrpSpPr>
         <p:cNvPr id="1" name=""/>
@@ -10449,7 +11220,7 @@
         </p:spPr>
         <p:txBody>
           <a:bodyPr>
-            <a:normAutofit fontScale="92500" lnSpcReduction="10000"/>
+            <a:normAutofit fontScale="92500"/>
           </a:bodyPr>
           <a:lstStyle/>
           <a:p>
@@ -10534,7 +11305,7 @@
           </a:prstGeom>
           <a:extLst>
             <a:ext uri="{C572A759-6A51-4108-AA02-DFA0A04FC94B}">
-              <ma14:wrappingTextBoxFlag xmlns:ma14="http://schemas.microsoft.com/office/mac/drawingml/2011/main" xmlns:a14="http://schemas.microsoft.com/office/drawing/2010/main" xmlns:m="http://schemas.openxmlformats.org/officeDocument/2006/math" xmlns="" val="1"/>
+              <ma14:wrappingTextBoxFlag xmlns="" xmlns:m="http://schemas.openxmlformats.org/officeDocument/2006/math" xmlns:a14="http://schemas.microsoft.com/office/drawing/2010/main" xmlns:ma14="http://schemas.microsoft.com/office/mac/drawingml/2011/main" val="1"/>
             </a:ext>
           </a:extLst>
         </p:spPr>
@@ -10793,6 +11564,16 @@
 <file path=ppt/slides/slide9.xml><?xml version="1.0" encoding="utf-8"?>
 <p:sld xmlns:a="http://schemas.openxmlformats.org/drawingml/2006/main" xmlns:r="http://schemas.openxmlformats.org/officeDocument/2006/relationships" xmlns:p="http://schemas.openxmlformats.org/presentationml/2006/main">
   <p:cSld>
+    <p:bg>
+      <p:bgPr>
+        <a:solidFill>
+          <a:schemeClr val="bg1">
+            <a:lumMod val="85000"/>
+          </a:schemeClr>
+        </a:solidFill>
+        <a:effectLst/>
+      </p:bgPr>
+    </p:bg>
     <p:spTree>
       <p:nvGrpSpPr>
         <p:cNvPr id="1" name=""/>
@@ -10902,7 +11683,7 @@
           </a:prstGeom>
           <a:extLst>
             <a:ext uri="{C572A759-6A51-4108-AA02-DFA0A04FC94B}">
-              <ma14:wrappingTextBoxFlag xmlns:ma14="http://schemas.microsoft.com/office/mac/drawingml/2011/main" xmlns:a14="http://schemas.microsoft.com/office/drawing/2010/main" xmlns:m="http://schemas.openxmlformats.org/officeDocument/2006/math" xmlns="" val="1"/>
+              <ma14:wrappingTextBoxFlag xmlns="" xmlns:m="http://schemas.openxmlformats.org/officeDocument/2006/math" xmlns:a14="http://schemas.microsoft.com/office/drawing/2010/main" xmlns:ma14="http://schemas.microsoft.com/office/mac/drawingml/2011/main" val="1"/>
             </a:ext>
           </a:extLst>
         </p:spPr>
@@ -10995,7 +11776,7 @@
             <a:effectLst/>
             <a:extLst>
               <a:ext uri="{C572A759-6A51-4108-AA02-DFA0A04FC94B}">
-                <ma14:wrappingTextBoxFlag xmlns:ma14="http://schemas.microsoft.com/office/mac/drawingml/2011/main" xmlns:a14="http://schemas.microsoft.com/office/drawing/2010/main" xmlns:m="http://schemas.openxmlformats.org/officeDocument/2006/math" xmlns="" val="1"/>
+                <ma14:wrappingTextBoxFlag xmlns="" xmlns:m="http://schemas.openxmlformats.org/officeDocument/2006/math" xmlns:a14="http://schemas.microsoft.com/office/drawing/2010/main" xmlns:ma14="http://schemas.microsoft.com/office/mac/drawingml/2011/main" val="1"/>
               </a:ext>
             </a:extLst>
           </p:spPr>
@@ -11304,9 +12085,9 @@
 </file>
 
 <file path=ppt/theme/theme1.xml><?xml version="1.0" encoding="utf-8"?>
-<a:theme xmlns:a="http://schemas.openxmlformats.org/drawingml/2006/main" name="Office 2013 - 2022 Theme">
+<a:theme xmlns:a="http://schemas.openxmlformats.org/drawingml/2006/main" name="a-processing-mouse-event-methods">
   <a:themeElements>
-    <a:clrScheme name="Office 2013 - 2022 Theme">
+    <a:clrScheme name="Office">
       <a:dk1>
         <a:sysClr val="windowText" lastClr="000000"/>
       </a:dk1>
@@ -11314,44 +12095,44 @@
         <a:sysClr val="window" lastClr="FFFFFF"/>
       </a:lt1>
       <a:dk2>
-        <a:srgbClr val="44546A"/>
+        <a:srgbClr val="1F497D"/>
       </a:dk2>
       <a:lt2>
-        <a:srgbClr val="E7E6E6"/>
+        <a:srgbClr val="EEECE1"/>
       </a:lt2>
       <a:accent1>
-        <a:srgbClr val="4472C4"/>
+        <a:srgbClr val="4F81BD"/>
       </a:accent1>
       <a:accent2>
-        <a:srgbClr val="ED7D31"/>
+        <a:srgbClr val="C0504D"/>
       </a:accent2>
       <a:accent3>
-        <a:srgbClr val="A5A5A5"/>
+        <a:srgbClr val="9BBB59"/>
       </a:accent3>
       <a:accent4>
-        <a:srgbClr val="FFC000"/>
+        <a:srgbClr val="8064A2"/>
       </a:accent4>
       <a:accent5>
-        <a:srgbClr val="5B9BD5"/>
+        <a:srgbClr val="4BACC6"/>
       </a:accent5>
       <a:accent6>
-        <a:srgbClr val="70AD47"/>
+        <a:srgbClr val="F79646"/>
       </a:accent6>
       <a:hlink>
-        <a:srgbClr val="0563C1"/>
+        <a:srgbClr val="0000FF"/>
       </a:hlink>
       <a:folHlink>
-        <a:srgbClr val="954F72"/>
+        <a:srgbClr val="800080"/>
       </a:folHlink>
     </a:clrScheme>
-    <a:fontScheme name="Office 2013 - 2022 Theme">
+    <a:fontScheme name="Office">
       <a:majorFont>
-        <a:latin typeface="Calibri Light" panose="020F0302020204030204"/>
+        <a:latin typeface="Calibri"/>
         <a:ea typeface=""/>
         <a:cs typeface=""/>
-        <a:font script="Jpan" typeface="游ゴシック Light"/>
+        <a:font script="Jpan" typeface="ＭＳ Ｐゴシック"/>
         <a:font script="Hang" typeface="맑은 고딕"/>
-        <a:font script="Hans" typeface="等线 Light"/>
+        <a:font script="Hans" typeface="宋体"/>
         <a:font script="Hant" typeface="新細明體"/>
         <a:font script="Arab" typeface="Times New Roman"/>
         <a:font script="Hebr" typeface="Times New Roman"/>
@@ -11378,15 +12159,14 @@
         <a:font script="Mong" typeface="Mongolian Baiti"/>
         <a:font script="Viet" typeface="Times New Roman"/>
         <a:font script="Uigh" typeface="Microsoft Uighur"/>
-        <a:font script="Geor" typeface="Sylfaen"/>
       </a:majorFont>
       <a:minorFont>
-        <a:latin typeface="Calibri" panose="020F0502020204030204"/>
+        <a:latin typeface="Calibri"/>
         <a:ea typeface=""/>
         <a:cs typeface=""/>
-        <a:font script="Jpan" typeface="游ゴシック"/>
+        <a:font script="Jpan" typeface="ＭＳ Ｐゴシック"/>
         <a:font script="Hang" typeface="맑은 고딕"/>
-        <a:font script="Hans" typeface="等线"/>
+        <a:font script="Hans" typeface="宋体"/>
         <a:font script="Hant" typeface="新細明體"/>
         <a:font script="Arab" typeface="Arial"/>
         <a:font script="Hebr" typeface="Arial"/>
@@ -11413,10 +12193,9 @@
         <a:font script="Mong" typeface="Mongolian Baiti"/>
         <a:font script="Viet" typeface="Arial"/>
         <a:font script="Uigh" typeface="Microsoft Uighur"/>
-        <a:font script="Geor" typeface="Sylfaen"/>
       </a:minorFont>
     </a:fontScheme>
-    <a:fmtScheme name="Office 2013 - 2022 Theme">
+    <a:fmtScheme name="Office">
       <a:fillStyleLst>
         <a:solidFill>
           <a:schemeClr val="phClr"/>
@@ -11425,142 +12204,166 @@
           <a:gsLst>
             <a:gs pos="0">
               <a:schemeClr val="phClr">
-                <a:lumMod val="110000"/>
-                <a:satMod val="105000"/>
-                <a:tint val="67000"/>
+                <a:tint val="50000"/>
+                <a:satMod val="300000"/>
               </a:schemeClr>
             </a:gs>
-            <a:gs pos="50000">
+            <a:gs pos="35000">
               <a:schemeClr val="phClr">
-                <a:lumMod val="105000"/>
-                <a:satMod val="103000"/>
-                <a:tint val="73000"/>
+                <a:tint val="37000"/>
+                <a:satMod val="300000"/>
               </a:schemeClr>
             </a:gs>
             <a:gs pos="100000">
               <a:schemeClr val="phClr">
-                <a:lumMod val="105000"/>
-                <a:satMod val="109000"/>
-                <a:tint val="81000"/>
+                <a:tint val="15000"/>
+                <a:satMod val="350000"/>
               </a:schemeClr>
             </a:gs>
           </a:gsLst>
-          <a:lin ang="5400000" scaled="0"/>
+          <a:lin ang="16200000" scaled="1"/>
         </a:gradFill>
         <a:gradFill rotWithShape="1">
           <a:gsLst>
             <a:gs pos="0">
               <a:schemeClr val="phClr">
-                <a:satMod val="103000"/>
-                <a:lumMod val="102000"/>
-                <a:tint val="94000"/>
+                <a:shade val="51000"/>
+                <a:satMod val="130000"/>
               </a:schemeClr>
             </a:gs>
-            <a:gs pos="50000">
+            <a:gs pos="80000">
               <a:schemeClr val="phClr">
-                <a:satMod val="110000"/>
-                <a:lumMod val="100000"/>
-                <a:shade val="100000"/>
+                <a:shade val="93000"/>
+                <a:satMod val="130000"/>
               </a:schemeClr>
             </a:gs>
             <a:gs pos="100000">
               <a:schemeClr val="phClr">
-                <a:lumMod val="99000"/>
-                <a:satMod val="120000"/>
-                <a:shade val="78000"/>
+                <a:shade val="94000"/>
+                <a:satMod val="135000"/>
               </a:schemeClr>
             </a:gs>
           </a:gsLst>
-          <a:lin ang="5400000" scaled="0"/>
+          <a:lin ang="16200000" scaled="0"/>
         </a:gradFill>
       </a:fillStyleLst>
       <a:lnStyleLst>
-        <a:ln w="6350" cap="flat" cmpd="sng" algn="ctr">
+        <a:ln w="9525" cap="flat" cmpd="sng" algn="ctr">
+          <a:solidFill>
+            <a:schemeClr val="phClr">
+              <a:shade val="95000"/>
+              <a:satMod val="105000"/>
+            </a:schemeClr>
+          </a:solidFill>
+          <a:prstDash val="solid"/>
+        </a:ln>
+        <a:ln w="25400" cap="flat" cmpd="sng" algn="ctr">
           <a:solidFill>
             <a:schemeClr val="phClr"/>
           </a:solidFill>
           <a:prstDash val="solid"/>
-          <a:miter lim="800000"/>
         </a:ln>
-        <a:ln w="12700" cap="flat" cmpd="sng" algn="ctr">
+        <a:ln w="38100" cap="flat" cmpd="sng" algn="ctr">
           <a:solidFill>
             <a:schemeClr val="phClr"/>
           </a:solidFill>
           <a:prstDash val="solid"/>
-          <a:miter lim="800000"/>
-        </a:ln>
-        <a:ln w="19050" cap="flat" cmpd="sng" algn="ctr">
-          <a:solidFill>
-            <a:schemeClr val="phClr"/>
-          </a:solidFill>
-          <a:prstDash val="solid"/>
-          <a:miter lim="800000"/>
         </a:ln>
       </a:lnStyleLst>
       <a:effectStyleLst>
         <a:effectStyle>
-          <a:effectLst/>
-        </a:effectStyle>
-        <a:effectStyle>
-          <a:effectLst/>
+          <a:effectLst>
+            <a:outerShdw blurRad="40000" dist="20000" dir="5400000" rotWithShape="0">
+              <a:srgbClr val="000000">
+                <a:alpha val="38000"/>
+              </a:srgbClr>
+            </a:outerShdw>
+          </a:effectLst>
         </a:effectStyle>
         <a:effectStyle>
           <a:effectLst>
-            <a:outerShdw blurRad="57150" dist="19050" dir="5400000" algn="ctr" rotWithShape="0">
+            <a:outerShdw blurRad="40000" dist="23000" dir="5400000" rotWithShape="0">
               <a:srgbClr val="000000">
-                <a:alpha val="63000"/>
+                <a:alpha val="35000"/>
               </a:srgbClr>
             </a:outerShdw>
           </a:effectLst>
+        </a:effectStyle>
+        <a:effectStyle>
+          <a:effectLst>
+            <a:outerShdw blurRad="40000" dist="23000" dir="5400000" rotWithShape="0">
+              <a:srgbClr val="000000">
+                <a:alpha val="35000"/>
+              </a:srgbClr>
+            </a:outerShdw>
+          </a:effectLst>
+          <a:scene3d>
+            <a:camera prst="orthographicFront">
+              <a:rot lat="0" lon="0" rev="0"/>
+            </a:camera>
+            <a:lightRig rig="threePt" dir="t">
+              <a:rot lat="0" lon="0" rev="1200000"/>
+            </a:lightRig>
+          </a:scene3d>
+          <a:sp3d>
+            <a:bevelT w="63500" h="25400"/>
+          </a:sp3d>
         </a:effectStyle>
       </a:effectStyleLst>
       <a:bgFillStyleLst>
         <a:solidFill>
           <a:schemeClr val="phClr"/>
         </a:solidFill>
-        <a:solidFill>
-          <a:schemeClr val="phClr">
-            <a:tint val="95000"/>
-            <a:satMod val="170000"/>
-          </a:schemeClr>
-        </a:solidFill>
         <a:gradFill rotWithShape="1">
           <a:gsLst>
             <a:gs pos="0">
               <a:schemeClr val="phClr">
-                <a:tint val="93000"/>
-                <a:satMod val="150000"/>
-                <a:shade val="98000"/>
-                <a:lumMod val="102000"/>
+                <a:tint val="40000"/>
+                <a:satMod val="350000"/>
               </a:schemeClr>
             </a:gs>
-            <a:gs pos="50000">
+            <a:gs pos="40000">
               <a:schemeClr val="phClr">
-                <a:tint val="98000"/>
-                <a:satMod val="130000"/>
-                <a:shade val="90000"/>
-                <a:lumMod val="103000"/>
+                <a:tint val="45000"/>
+                <a:shade val="99000"/>
+                <a:satMod val="350000"/>
               </a:schemeClr>
             </a:gs>
             <a:gs pos="100000">
               <a:schemeClr val="phClr">
-                <a:shade val="63000"/>
-                <a:satMod val="120000"/>
+                <a:shade val="20000"/>
+                <a:satMod val="255000"/>
               </a:schemeClr>
             </a:gs>
           </a:gsLst>
-          <a:lin ang="5400000" scaled="0"/>
+          <a:path path="circle">
+            <a:fillToRect l="50000" t="-80000" r="50000" b="180000"/>
+          </a:path>
+        </a:gradFill>
+        <a:gradFill rotWithShape="1">
+          <a:gsLst>
+            <a:gs pos="0">
+              <a:schemeClr val="phClr">
+                <a:tint val="80000"/>
+                <a:satMod val="300000"/>
+              </a:schemeClr>
+            </a:gs>
+            <a:gs pos="100000">
+              <a:schemeClr val="phClr">
+                <a:shade val="30000"/>
+                <a:satMod val="200000"/>
+              </a:schemeClr>
+            </a:gs>
+          </a:gsLst>
+          <a:path path="circle">
+            <a:fillToRect l="50000" t="50000" r="50000" b="50000"/>
+          </a:path>
         </a:gradFill>
       </a:bgFillStyleLst>
     </a:fmtScheme>
   </a:themeElements>
   <a:objectDefaults/>
   <a:extraClrSchemeLst/>
-  <a:extLst>
-    <a:ext uri="{05A4C25C-085E-4340-85A3-A5531E510DB2}">
-      <thm15:themeFamily xmlns:thm15="http://schemas.microsoft.com/office/thememl/2012/main" name="Office 2013 - 2022 Theme" id="{62F939B6-93AF-4DB8-9C6B-D6C7DFDC589F}" vid="{4A3C46E8-61CC-4603-A589-7422A47A8E4A}"/>
-    </a:ext>
-  </a:extLst>
 </a:theme>
 </file>
 

--- a/topic01-objects-and-classes/unit-1/talk-2-classes/classes.pptx
+++ b/topic01-objects-and-classes/unit-1/talk-2-classes/classes.pptx
@@ -4265,7 +4265,7 @@
           </a:ln>
           <a:extLst>
             <a:ext uri="{C572A759-6A51-4108-AA02-DFA0A04FC94B}">
-              <ma14:wrappingTextBoxFlag xmlns="" xmlns:m="http://schemas.openxmlformats.org/officeDocument/2006/math" xmlns:a14="http://schemas.microsoft.com/office/drawing/2010/main" xmlns:ma14="http://schemas.microsoft.com/office/mac/drawingml/2011/main" val="1"/>
+              <ma14:wrappingTextBoxFlag xmlns:ma14="http://schemas.microsoft.com/office/mac/drawingml/2011/main" xmlns:a14="http://schemas.microsoft.com/office/drawing/2010/main" xmlns:m="http://schemas.openxmlformats.org/officeDocument/2006/math" xmlns="" val="1"/>
             </a:ext>
           </a:extLst>
         </p:spPr>
@@ -4438,7 +4438,7 @@
           </a:prstGeom>
           <a:extLst>
             <a:ext uri="{C572A759-6A51-4108-AA02-DFA0A04FC94B}">
-              <ma14:wrappingTextBoxFlag xmlns="" xmlns:m="http://schemas.openxmlformats.org/officeDocument/2006/math" xmlns:a14="http://schemas.microsoft.com/office/drawing/2010/main" xmlns:ma14="http://schemas.microsoft.com/office/mac/drawingml/2011/main" val="1"/>
+              <ma14:wrappingTextBoxFlag xmlns:ma14="http://schemas.microsoft.com/office/mac/drawingml/2011/main" xmlns:a14="http://schemas.microsoft.com/office/drawing/2010/main" xmlns:m="http://schemas.openxmlformats.org/officeDocument/2006/math" xmlns="" val="1"/>
             </a:ext>
           </a:extLst>
         </p:spPr>
@@ -4593,7 +4593,7 @@
           </a:prstGeom>
           <a:extLst>
             <a:ext uri="{C572A759-6A51-4108-AA02-DFA0A04FC94B}">
-              <ma14:wrappingTextBoxFlag xmlns="" xmlns:m="http://schemas.openxmlformats.org/officeDocument/2006/math" xmlns:a14="http://schemas.microsoft.com/office/drawing/2010/main" xmlns:ma14="http://schemas.microsoft.com/office/mac/drawingml/2011/main" val="1"/>
+              <ma14:wrappingTextBoxFlag xmlns:ma14="http://schemas.microsoft.com/office/mac/drawingml/2011/main" xmlns:a14="http://schemas.microsoft.com/office/drawing/2010/main" xmlns:m="http://schemas.openxmlformats.org/officeDocument/2006/math" xmlns="" val="1"/>
             </a:ext>
           </a:extLst>
         </p:spPr>
@@ -5133,7 +5133,7 @@
           </a:prstGeom>
           <a:extLst>
             <a:ext uri="{C572A759-6A51-4108-AA02-DFA0A04FC94B}">
-              <ma14:wrappingTextBoxFlag xmlns="" xmlns:m="http://schemas.openxmlformats.org/officeDocument/2006/math" xmlns:a14="http://schemas.microsoft.com/office/drawing/2010/main" xmlns:ma14="http://schemas.microsoft.com/office/mac/drawingml/2011/main" val="1"/>
+              <ma14:wrappingTextBoxFlag xmlns:ma14="http://schemas.microsoft.com/office/mac/drawingml/2011/main" xmlns:a14="http://schemas.microsoft.com/office/drawing/2010/main" xmlns:m="http://schemas.openxmlformats.org/officeDocument/2006/math" xmlns="" val="1"/>
             </a:ext>
           </a:extLst>
         </p:spPr>
@@ -5204,7 +5204,7 @@
           </a:prstGeom>
           <a:extLst>
             <a:ext uri="{C572A759-6A51-4108-AA02-DFA0A04FC94B}">
-              <ma14:wrappingTextBoxFlag xmlns="" xmlns:m="http://schemas.openxmlformats.org/officeDocument/2006/math" xmlns:a14="http://schemas.microsoft.com/office/drawing/2010/main" xmlns:ma14="http://schemas.microsoft.com/office/mac/drawingml/2011/main" val="1"/>
+              <ma14:wrappingTextBoxFlag xmlns:ma14="http://schemas.microsoft.com/office/mac/drawingml/2011/main" xmlns:a14="http://schemas.microsoft.com/office/drawing/2010/main" xmlns:m="http://schemas.openxmlformats.org/officeDocument/2006/math" xmlns="" val="1"/>
             </a:ext>
           </a:extLst>
         </p:spPr>
@@ -5416,7 +5416,7 @@
           </a:prstGeom>
           <a:extLst>
             <a:ext uri="{C572A759-6A51-4108-AA02-DFA0A04FC94B}">
-              <ma14:wrappingTextBoxFlag xmlns="" xmlns:m="http://schemas.openxmlformats.org/officeDocument/2006/math" xmlns:a14="http://schemas.microsoft.com/office/drawing/2010/main" xmlns:ma14="http://schemas.microsoft.com/office/mac/drawingml/2011/main" val="1"/>
+              <ma14:wrappingTextBoxFlag xmlns:ma14="http://schemas.microsoft.com/office/mac/drawingml/2011/main" xmlns:a14="http://schemas.microsoft.com/office/drawing/2010/main" xmlns:m="http://schemas.openxmlformats.org/officeDocument/2006/math" xmlns="" val="1"/>
             </a:ext>
           </a:extLst>
         </p:spPr>
@@ -5617,7 +5617,7 @@
           </a:prstGeom>
           <a:extLst>
             <a:ext uri="{C572A759-6A51-4108-AA02-DFA0A04FC94B}">
-              <ma14:wrappingTextBoxFlag xmlns="" xmlns:m="http://schemas.openxmlformats.org/officeDocument/2006/math" xmlns:a14="http://schemas.microsoft.com/office/drawing/2010/main" xmlns:ma14="http://schemas.microsoft.com/office/mac/drawingml/2011/main" val="1"/>
+              <ma14:wrappingTextBoxFlag xmlns:ma14="http://schemas.microsoft.com/office/mac/drawingml/2011/main" xmlns:a14="http://schemas.microsoft.com/office/drawing/2010/main" xmlns:m="http://schemas.openxmlformats.org/officeDocument/2006/math" xmlns="" val="1"/>
             </a:ext>
           </a:extLst>
         </p:spPr>
@@ -6036,7 +6036,7 @@
           </a:prstGeom>
           <a:extLst>
             <a:ext uri="{C572A759-6A51-4108-AA02-DFA0A04FC94B}">
-              <ma14:wrappingTextBoxFlag xmlns="" xmlns:m="http://schemas.openxmlformats.org/officeDocument/2006/math" xmlns:a14="http://schemas.microsoft.com/office/drawing/2010/main" xmlns:ma14="http://schemas.microsoft.com/office/mac/drawingml/2011/main" val="1"/>
+              <ma14:wrappingTextBoxFlag xmlns:ma14="http://schemas.microsoft.com/office/mac/drawingml/2011/main" xmlns:a14="http://schemas.microsoft.com/office/drawing/2010/main" xmlns:m="http://schemas.openxmlformats.org/officeDocument/2006/math" xmlns="" val="1"/>
             </a:ext>
           </a:extLst>
         </p:spPr>
@@ -6479,7 +6479,7 @@
           </a:prstGeom>
           <a:extLst>
             <a:ext uri="{C572A759-6A51-4108-AA02-DFA0A04FC94B}">
-              <ma14:wrappingTextBoxFlag xmlns="" xmlns:m="http://schemas.openxmlformats.org/officeDocument/2006/math" xmlns:a14="http://schemas.microsoft.com/office/drawing/2010/main" xmlns:ma14="http://schemas.microsoft.com/office/mac/drawingml/2011/main" val="1"/>
+              <ma14:wrappingTextBoxFlag xmlns:ma14="http://schemas.microsoft.com/office/mac/drawingml/2011/main" xmlns:a14="http://schemas.microsoft.com/office/drawing/2010/main" xmlns:m="http://schemas.openxmlformats.org/officeDocument/2006/math" xmlns="" val="1"/>
             </a:ext>
           </a:extLst>
         </p:spPr>
@@ -7390,7 +7390,7 @@
           </a:prstGeom>
           <a:extLst>
             <a:ext uri="{C572A759-6A51-4108-AA02-DFA0A04FC94B}">
-              <ma14:wrappingTextBoxFlag xmlns="" xmlns:m="http://schemas.openxmlformats.org/officeDocument/2006/math" xmlns:a14="http://schemas.microsoft.com/office/drawing/2010/main" xmlns:ma14="http://schemas.microsoft.com/office/mac/drawingml/2011/main" val="1"/>
+              <ma14:wrappingTextBoxFlag xmlns:ma14="http://schemas.microsoft.com/office/mac/drawingml/2011/main" xmlns:a14="http://schemas.microsoft.com/office/drawing/2010/main" xmlns:m="http://schemas.openxmlformats.org/officeDocument/2006/math" xmlns="" val="1"/>
             </a:ext>
           </a:extLst>
         </p:spPr>
@@ -8137,7 +8137,7 @@
           </a:prstGeom>
           <a:extLst>
             <a:ext uri="{C572A759-6A51-4108-AA02-DFA0A04FC94B}">
-              <ma14:wrappingTextBoxFlag xmlns="" xmlns:m="http://schemas.openxmlformats.org/officeDocument/2006/math" xmlns:a14="http://schemas.microsoft.com/office/drawing/2010/main" xmlns:ma14="http://schemas.microsoft.com/office/mac/drawingml/2011/main" val="1"/>
+              <ma14:wrappingTextBoxFlag xmlns:ma14="http://schemas.microsoft.com/office/mac/drawingml/2011/main" xmlns:a14="http://schemas.microsoft.com/office/drawing/2010/main" xmlns:m="http://schemas.openxmlformats.org/officeDocument/2006/math" xmlns="" val="1"/>
             </a:ext>
           </a:extLst>
         </p:spPr>
@@ -8533,7 +8533,7 @@
           </a:prstGeom>
           <a:extLst>
             <a:ext uri="{C572A759-6A51-4108-AA02-DFA0A04FC94B}">
-              <ma14:wrappingTextBoxFlag xmlns="" xmlns:m="http://schemas.openxmlformats.org/officeDocument/2006/math" xmlns:a14="http://schemas.microsoft.com/office/drawing/2010/main" xmlns:ma14="http://schemas.microsoft.com/office/mac/drawingml/2011/main" val="1"/>
+              <ma14:wrappingTextBoxFlag xmlns:ma14="http://schemas.microsoft.com/office/mac/drawingml/2011/main" xmlns:a14="http://schemas.microsoft.com/office/drawing/2010/main" xmlns:m="http://schemas.openxmlformats.org/officeDocument/2006/math" xmlns="" val="1"/>
             </a:ext>
           </a:extLst>
         </p:spPr>
@@ -8608,9 +8608,15 @@
       </p:sp>
       <p:pic>
         <p:nvPicPr>
-          <p:cNvPr id="3074" name="Picture 2" descr="Image result for questions"/>
+          <p:cNvPr id="3" name="Picture 2" descr="A green question mark in a circle&#10;&#10;AI-generated content may be incorrect.">
+            <a:extLst>
+              <a:ext uri="{FF2B5EF4-FFF2-40B4-BE49-F238E27FC236}">
+                <a16:creationId xmlns:a16="http://schemas.microsoft.com/office/drawing/2014/main" id="{4021528B-859B-0F0C-6479-D9428D88B2DF}"/>
+              </a:ext>
+            </a:extLst>
+          </p:cNvPr>
           <p:cNvPicPr>
-            <a:picLocks noChangeAspect="1" noChangeArrowheads="1"/>
+            <a:picLocks noChangeAspect="1"/>
           </p:cNvPicPr>
           <p:nvPr/>
         </p:nvPicPr>
@@ -8622,29 +8628,18 @@
               </a:ext>
             </a:extLst>
           </a:blip>
-          <a:srcRect/>
           <a:stretch>
             <a:fillRect/>
           </a:stretch>
         </p:blipFill>
-        <p:spPr bwMode="auto">
+        <p:spPr>
           <a:xfrm>
-            <a:off x="3810000" y="2057401"/>
-            <a:ext cx="4343400" cy="3509469"/>
+            <a:off x="2971800" y="1325562"/>
+            <a:ext cx="5257800" cy="5257800"/>
           </a:xfrm>
           <a:prstGeom prst="rect">
             <a:avLst/>
           </a:prstGeom>
-          <a:noFill/>
-          <a:extLst>
-            <a:ext uri="{909E8E84-426E-40DD-AFC4-6F175D3DCCD1}">
-              <a14:hiddenFill xmlns:a14="http://schemas.microsoft.com/office/drawing/2010/main">
-                <a:solidFill>
-                  <a:srgbClr val="FFFFFF"/>
-                </a:solidFill>
-              </a14:hiddenFill>
-            </a:ext>
-          </a:extLst>
         </p:spPr>
       </p:pic>
     </p:spTree>
@@ -8772,7 +8767,7 @@
           </a:prstGeom>
           <a:extLst>
             <a:ext uri="{C572A759-6A51-4108-AA02-DFA0A04FC94B}">
-              <ma14:wrappingTextBoxFlag xmlns="" xmlns:m="http://schemas.openxmlformats.org/officeDocument/2006/math" xmlns:a14="http://schemas.microsoft.com/office/drawing/2010/main" xmlns:ma14="http://schemas.microsoft.com/office/mac/drawingml/2011/main" val="1"/>
+              <ma14:wrappingTextBoxFlag xmlns:ma14="http://schemas.microsoft.com/office/mac/drawingml/2011/main" xmlns:a14="http://schemas.microsoft.com/office/drawing/2010/main" xmlns:m="http://schemas.openxmlformats.org/officeDocument/2006/math" xmlns="" val="1"/>
             </a:ext>
           </a:extLst>
         </p:spPr>
@@ -8816,7 +8811,7 @@
           </a:ln>
           <a:extLst>
             <a:ext uri="{C572A759-6A51-4108-AA02-DFA0A04FC94B}">
-              <ma14:wrappingTextBoxFlag xmlns="" xmlns:m="http://schemas.openxmlformats.org/officeDocument/2006/math" xmlns:a14="http://schemas.microsoft.com/office/drawing/2010/main" xmlns:ma14="http://schemas.microsoft.com/office/mac/drawingml/2011/main" val="1"/>
+              <ma14:wrappingTextBoxFlag xmlns:ma14="http://schemas.microsoft.com/office/mac/drawingml/2011/main" xmlns:a14="http://schemas.microsoft.com/office/drawing/2010/main" xmlns:m="http://schemas.openxmlformats.org/officeDocument/2006/math" xmlns="" val="1"/>
             </a:ext>
           </a:extLst>
         </p:spPr>
@@ -8864,7 +8859,7 @@
           </a:ln>
           <a:extLst>
             <a:ext uri="{C572A759-6A51-4108-AA02-DFA0A04FC94B}">
-              <ma14:wrappingTextBoxFlag xmlns="" xmlns:m="http://schemas.openxmlformats.org/officeDocument/2006/math" xmlns:a14="http://schemas.microsoft.com/office/drawing/2010/main" xmlns:ma14="http://schemas.microsoft.com/office/mac/drawingml/2011/main" val="1"/>
+              <ma14:wrappingTextBoxFlag xmlns:ma14="http://schemas.microsoft.com/office/mac/drawingml/2011/main" xmlns:a14="http://schemas.microsoft.com/office/drawing/2010/main" xmlns:m="http://schemas.openxmlformats.org/officeDocument/2006/math" xmlns="" val="1"/>
             </a:ext>
           </a:extLst>
         </p:spPr>
@@ -8912,7 +8907,7 @@
           </a:ln>
           <a:extLst>
             <a:ext uri="{C572A759-6A51-4108-AA02-DFA0A04FC94B}">
-              <ma14:wrappingTextBoxFlag xmlns="" xmlns:m="http://schemas.openxmlformats.org/officeDocument/2006/math" xmlns:a14="http://schemas.microsoft.com/office/drawing/2010/main" xmlns:ma14="http://schemas.microsoft.com/office/mac/drawingml/2011/main" val="1"/>
+              <ma14:wrappingTextBoxFlag xmlns:ma14="http://schemas.microsoft.com/office/mac/drawingml/2011/main" xmlns:a14="http://schemas.microsoft.com/office/drawing/2010/main" xmlns:m="http://schemas.openxmlformats.org/officeDocument/2006/math" xmlns="" val="1"/>
             </a:ext>
           </a:extLst>
         </p:spPr>
@@ -8960,7 +8955,7 @@
           </a:ln>
           <a:extLst>
             <a:ext uri="{C572A759-6A51-4108-AA02-DFA0A04FC94B}">
-              <ma14:wrappingTextBoxFlag xmlns="" xmlns:m="http://schemas.openxmlformats.org/officeDocument/2006/math" xmlns:a14="http://schemas.microsoft.com/office/drawing/2010/main" xmlns:ma14="http://schemas.microsoft.com/office/mac/drawingml/2011/main" val="1"/>
+              <ma14:wrappingTextBoxFlag xmlns:ma14="http://schemas.microsoft.com/office/mac/drawingml/2011/main" xmlns:a14="http://schemas.microsoft.com/office/drawing/2010/main" xmlns:m="http://schemas.openxmlformats.org/officeDocument/2006/math" xmlns="" val="1"/>
             </a:ext>
           </a:extLst>
         </p:spPr>
@@ -9008,7 +9003,7 @@
           </a:ln>
           <a:extLst>
             <a:ext uri="{C572A759-6A51-4108-AA02-DFA0A04FC94B}">
-              <ma14:wrappingTextBoxFlag xmlns="" xmlns:m="http://schemas.openxmlformats.org/officeDocument/2006/math" xmlns:a14="http://schemas.microsoft.com/office/drawing/2010/main" xmlns:ma14="http://schemas.microsoft.com/office/mac/drawingml/2011/main" val="1"/>
+              <ma14:wrappingTextBoxFlag xmlns:ma14="http://schemas.microsoft.com/office/mac/drawingml/2011/main" xmlns:a14="http://schemas.microsoft.com/office/drawing/2010/main" xmlns:m="http://schemas.openxmlformats.org/officeDocument/2006/math" xmlns="" val="1"/>
             </a:ext>
           </a:extLst>
         </p:spPr>
@@ -9056,7 +9051,7 @@
           </a:ln>
           <a:extLst>
             <a:ext uri="{C572A759-6A51-4108-AA02-DFA0A04FC94B}">
-              <ma14:wrappingTextBoxFlag xmlns="" xmlns:m="http://schemas.openxmlformats.org/officeDocument/2006/math" xmlns:a14="http://schemas.microsoft.com/office/drawing/2010/main" xmlns:ma14="http://schemas.microsoft.com/office/mac/drawingml/2011/main" val="1"/>
+              <ma14:wrappingTextBoxFlag xmlns:ma14="http://schemas.microsoft.com/office/mac/drawingml/2011/main" xmlns:a14="http://schemas.microsoft.com/office/drawing/2010/main" xmlns:m="http://schemas.openxmlformats.org/officeDocument/2006/math" xmlns="" val="1"/>
             </a:ext>
           </a:extLst>
         </p:spPr>
@@ -9104,7 +9099,7 @@
           </a:ln>
           <a:extLst>
             <a:ext uri="{C572A759-6A51-4108-AA02-DFA0A04FC94B}">
-              <ma14:wrappingTextBoxFlag xmlns="" xmlns:m="http://schemas.openxmlformats.org/officeDocument/2006/math" xmlns:a14="http://schemas.microsoft.com/office/drawing/2010/main" xmlns:ma14="http://schemas.microsoft.com/office/mac/drawingml/2011/main" val="1"/>
+              <ma14:wrappingTextBoxFlag xmlns:ma14="http://schemas.microsoft.com/office/mac/drawingml/2011/main" xmlns:a14="http://schemas.microsoft.com/office/drawing/2010/main" xmlns:m="http://schemas.openxmlformats.org/officeDocument/2006/math" xmlns="" val="1"/>
             </a:ext>
           </a:extLst>
         </p:spPr>
@@ -9152,7 +9147,7 @@
           </a:ln>
           <a:extLst>
             <a:ext uri="{C572A759-6A51-4108-AA02-DFA0A04FC94B}">
-              <ma14:wrappingTextBoxFlag xmlns="" xmlns:m="http://schemas.openxmlformats.org/officeDocument/2006/math" xmlns:a14="http://schemas.microsoft.com/office/drawing/2010/main" xmlns:ma14="http://schemas.microsoft.com/office/mac/drawingml/2011/main" val="1"/>
+              <ma14:wrappingTextBoxFlag xmlns:ma14="http://schemas.microsoft.com/office/mac/drawingml/2011/main" xmlns:a14="http://schemas.microsoft.com/office/drawing/2010/main" xmlns:m="http://schemas.openxmlformats.org/officeDocument/2006/math" xmlns="" val="1"/>
             </a:ext>
           </a:extLst>
         </p:spPr>
@@ -9200,7 +9195,7 @@
           </a:ln>
           <a:extLst>
             <a:ext uri="{C572A759-6A51-4108-AA02-DFA0A04FC94B}">
-              <ma14:wrappingTextBoxFlag xmlns="" xmlns:m="http://schemas.openxmlformats.org/officeDocument/2006/math" xmlns:a14="http://schemas.microsoft.com/office/drawing/2010/main" xmlns:ma14="http://schemas.microsoft.com/office/mac/drawingml/2011/main" val="1"/>
+              <ma14:wrappingTextBoxFlag xmlns:ma14="http://schemas.microsoft.com/office/mac/drawingml/2011/main" xmlns:a14="http://schemas.microsoft.com/office/drawing/2010/main" xmlns:m="http://schemas.openxmlformats.org/officeDocument/2006/math" xmlns="" val="1"/>
             </a:ext>
           </a:extLst>
         </p:spPr>
@@ -9248,7 +9243,7 @@
           </a:ln>
           <a:extLst>
             <a:ext uri="{C572A759-6A51-4108-AA02-DFA0A04FC94B}">
-              <ma14:wrappingTextBoxFlag xmlns="" xmlns:m="http://schemas.openxmlformats.org/officeDocument/2006/math" xmlns:a14="http://schemas.microsoft.com/office/drawing/2010/main" xmlns:ma14="http://schemas.microsoft.com/office/mac/drawingml/2011/main" val="1"/>
+              <ma14:wrappingTextBoxFlag xmlns:ma14="http://schemas.microsoft.com/office/mac/drawingml/2011/main" xmlns:a14="http://schemas.microsoft.com/office/drawing/2010/main" xmlns:m="http://schemas.openxmlformats.org/officeDocument/2006/math" xmlns="" val="1"/>
             </a:ext>
           </a:extLst>
         </p:spPr>
@@ -9296,7 +9291,7 @@
           </a:ln>
           <a:extLst>
             <a:ext uri="{C572A759-6A51-4108-AA02-DFA0A04FC94B}">
-              <ma14:wrappingTextBoxFlag xmlns="" xmlns:m="http://schemas.openxmlformats.org/officeDocument/2006/math" xmlns:a14="http://schemas.microsoft.com/office/drawing/2010/main" xmlns:ma14="http://schemas.microsoft.com/office/mac/drawingml/2011/main" val="1"/>
+              <ma14:wrappingTextBoxFlag xmlns:ma14="http://schemas.microsoft.com/office/mac/drawingml/2011/main" xmlns:a14="http://schemas.microsoft.com/office/drawing/2010/main" xmlns:m="http://schemas.openxmlformats.org/officeDocument/2006/math" xmlns="" val="1"/>
             </a:ext>
           </a:extLst>
         </p:spPr>
@@ -9344,7 +9339,7 @@
           </a:ln>
           <a:extLst>
             <a:ext uri="{C572A759-6A51-4108-AA02-DFA0A04FC94B}">
-              <ma14:wrappingTextBoxFlag xmlns="" xmlns:m="http://schemas.openxmlformats.org/officeDocument/2006/math" xmlns:a14="http://schemas.microsoft.com/office/drawing/2010/main" xmlns:ma14="http://schemas.microsoft.com/office/mac/drawingml/2011/main" val="1"/>
+              <ma14:wrappingTextBoxFlag xmlns:ma14="http://schemas.microsoft.com/office/mac/drawingml/2011/main" xmlns:a14="http://schemas.microsoft.com/office/drawing/2010/main" xmlns:m="http://schemas.openxmlformats.org/officeDocument/2006/math" xmlns="" val="1"/>
             </a:ext>
           </a:extLst>
         </p:spPr>
@@ -9392,7 +9387,7 @@
           </a:ln>
           <a:extLst>
             <a:ext uri="{C572A759-6A51-4108-AA02-DFA0A04FC94B}">
-              <ma14:wrappingTextBoxFlag xmlns="" xmlns:m="http://schemas.openxmlformats.org/officeDocument/2006/math" xmlns:a14="http://schemas.microsoft.com/office/drawing/2010/main" xmlns:ma14="http://schemas.microsoft.com/office/mac/drawingml/2011/main" val="1"/>
+              <ma14:wrappingTextBoxFlag xmlns:ma14="http://schemas.microsoft.com/office/mac/drawingml/2011/main" xmlns:a14="http://schemas.microsoft.com/office/drawing/2010/main" xmlns:m="http://schemas.openxmlformats.org/officeDocument/2006/math" xmlns="" val="1"/>
             </a:ext>
           </a:extLst>
         </p:spPr>
@@ -9440,7 +9435,7 @@
           </a:ln>
           <a:extLst>
             <a:ext uri="{C572A759-6A51-4108-AA02-DFA0A04FC94B}">
-              <ma14:wrappingTextBoxFlag xmlns="" xmlns:m="http://schemas.openxmlformats.org/officeDocument/2006/math" xmlns:a14="http://schemas.microsoft.com/office/drawing/2010/main" xmlns:ma14="http://schemas.microsoft.com/office/mac/drawingml/2011/main" val="1"/>
+              <ma14:wrappingTextBoxFlag xmlns:ma14="http://schemas.microsoft.com/office/mac/drawingml/2011/main" xmlns:a14="http://schemas.microsoft.com/office/drawing/2010/main" xmlns:m="http://schemas.openxmlformats.org/officeDocument/2006/math" xmlns="" val="1"/>
             </a:ext>
           </a:extLst>
         </p:spPr>
@@ -9488,7 +9483,7 @@
           </a:ln>
           <a:extLst>
             <a:ext uri="{C572A759-6A51-4108-AA02-DFA0A04FC94B}">
-              <ma14:wrappingTextBoxFlag xmlns="" xmlns:m="http://schemas.openxmlformats.org/officeDocument/2006/math" xmlns:a14="http://schemas.microsoft.com/office/drawing/2010/main" xmlns:ma14="http://schemas.microsoft.com/office/mac/drawingml/2011/main" val="1"/>
+              <ma14:wrappingTextBoxFlag xmlns:ma14="http://schemas.microsoft.com/office/mac/drawingml/2011/main" xmlns:a14="http://schemas.microsoft.com/office/drawing/2010/main" xmlns:m="http://schemas.openxmlformats.org/officeDocument/2006/math" xmlns="" val="1"/>
             </a:ext>
           </a:extLst>
         </p:spPr>
@@ -9536,7 +9531,7 @@
           </a:ln>
           <a:extLst>
             <a:ext uri="{C572A759-6A51-4108-AA02-DFA0A04FC94B}">
-              <ma14:wrappingTextBoxFlag xmlns="" xmlns:m="http://schemas.openxmlformats.org/officeDocument/2006/math" xmlns:a14="http://schemas.microsoft.com/office/drawing/2010/main" xmlns:ma14="http://schemas.microsoft.com/office/mac/drawingml/2011/main" val="1"/>
+              <ma14:wrappingTextBoxFlag xmlns:ma14="http://schemas.microsoft.com/office/mac/drawingml/2011/main" xmlns:a14="http://schemas.microsoft.com/office/drawing/2010/main" xmlns:m="http://schemas.openxmlformats.org/officeDocument/2006/math" xmlns="" val="1"/>
             </a:ext>
           </a:extLst>
         </p:spPr>
@@ -10198,7 +10193,7 @@
           </a:prstGeom>
           <a:extLst>
             <a:ext uri="{C572A759-6A51-4108-AA02-DFA0A04FC94B}">
-              <ma14:wrappingTextBoxFlag xmlns="" xmlns:m="http://schemas.openxmlformats.org/officeDocument/2006/math" xmlns:a14="http://schemas.microsoft.com/office/drawing/2010/main" xmlns:ma14="http://schemas.microsoft.com/office/mac/drawingml/2011/main" val="1"/>
+              <ma14:wrappingTextBoxFlag xmlns:ma14="http://schemas.microsoft.com/office/mac/drawingml/2011/main" xmlns:a14="http://schemas.microsoft.com/office/drawing/2010/main" xmlns:m="http://schemas.openxmlformats.org/officeDocument/2006/math" xmlns="" val="1"/>
             </a:ext>
           </a:extLst>
         </p:spPr>
@@ -10647,7 +10642,7 @@
           </a:prstGeom>
           <a:extLst>
             <a:ext uri="{C572A759-6A51-4108-AA02-DFA0A04FC94B}">
-              <ma14:wrappingTextBoxFlag xmlns="" xmlns:m="http://schemas.openxmlformats.org/officeDocument/2006/math" xmlns:a14="http://schemas.microsoft.com/office/drawing/2010/main" xmlns:ma14="http://schemas.microsoft.com/office/mac/drawingml/2011/main" val="1"/>
+              <ma14:wrappingTextBoxFlag xmlns:ma14="http://schemas.microsoft.com/office/mac/drawingml/2011/main" xmlns:a14="http://schemas.microsoft.com/office/drawing/2010/main" xmlns:m="http://schemas.openxmlformats.org/officeDocument/2006/math" xmlns="" val="1"/>
             </a:ext>
           </a:extLst>
         </p:spPr>
@@ -10712,7 +10707,7 @@
           </a:ln>
           <a:extLst>
             <a:ext uri="{C572A759-6A51-4108-AA02-DFA0A04FC94B}">
-              <ma14:wrappingTextBoxFlag xmlns="" xmlns:m="http://schemas.openxmlformats.org/officeDocument/2006/math" xmlns:a14="http://schemas.microsoft.com/office/drawing/2010/main" xmlns:ma14="http://schemas.microsoft.com/office/mac/drawingml/2011/main" val="1"/>
+              <ma14:wrappingTextBoxFlag xmlns:ma14="http://schemas.microsoft.com/office/mac/drawingml/2011/main" xmlns:a14="http://schemas.microsoft.com/office/drawing/2010/main" xmlns:m="http://schemas.openxmlformats.org/officeDocument/2006/math" xmlns="" val="1"/>
             </a:ext>
           </a:extLst>
         </p:spPr>
@@ -10977,7 +10972,7 @@
           </a:prstGeom>
           <a:extLst>
             <a:ext uri="{C572A759-6A51-4108-AA02-DFA0A04FC94B}">
-              <ma14:wrappingTextBoxFlag xmlns="" xmlns:m="http://schemas.openxmlformats.org/officeDocument/2006/math" xmlns:a14="http://schemas.microsoft.com/office/drawing/2010/main" xmlns:ma14="http://schemas.microsoft.com/office/mac/drawingml/2011/main" val="1"/>
+              <ma14:wrappingTextBoxFlag xmlns:ma14="http://schemas.microsoft.com/office/mac/drawingml/2011/main" xmlns:a14="http://schemas.microsoft.com/office/drawing/2010/main" xmlns:m="http://schemas.openxmlformats.org/officeDocument/2006/math" xmlns="" val="1"/>
             </a:ext>
           </a:extLst>
         </p:spPr>
@@ -11124,7 +11119,7 @@
           </a:prstGeom>
           <a:extLst>
             <a:ext uri="{C572A759-6A51-4108-AA02-DFA0A04FC94B}">
-              <ma14:wrappingTextBoxFlag xmlns="" xmlns:m="http://schemas.openxmlformats.org/officeDocument/2006/math" xmlns:a14="http://schemas.microsoft.com/office/drawing/2010/main" xmlns:ma14="http://schemas.microsoft.com/office/mac/drawingml/2011/main" val="1"/>
+              <ma14:wrappingTextBoxFlag xmlns:ma14="http://schemas.microsoft.com/office/mac/drawingml/2011/main" xmlns:a14="http://schemas.microsoft.com/office/drawing/2010/main" xmlns:m="http://schemas.openxmlformats.org/officeDocument/2006/math" xmlns="" val="1"/>
             </a:ext>
           </a:extLst>
         </p:spPr>
@@ -11305,7 +11300,7 @@
           </a:prstGeom>
           <a:extLst>
             <a:ext uri="{C572A759-6A51-4108-AA02-DFA0A04FC94B}">
-              <ma14:wrappingTextBoxFlag xmlns="" xmlns:m="http://schemas.openxmlformats.org/officeDocument/2006/math" xmlns:a14="http://schemas.microsoft.com/office/drawing/2010/main" xmlns:ma14="http://schemas.microsoft.com/office/mac/drawingml/2011/main" val="1"/>
+              <ma14:wrappingTextBoxFlag xmlns:ma14="http://schemas.microsoft.com/office/mac/drawingml/2011/main" xmlns:a14="http://schemas.microsoft.com/office/drawing/2010/main" xmlns:m="http://schemas.openxmlformats.org/officeDocument/2006/math" xmlns="" val="1"/>
             </a:ext>
           </a:extLst>
         </p:spPr>
@@ -11683,7 +11678,7 @@
           </a:prstGeom>
           <a:extLst>
             <a:ext uri="{C572A759-6A51-4108-AA02-DFA0A04FC94B}">
-              <ma14:wrappingTextBoxFlag xmlns="" xmlns:m="http://schemas.openxmlformats.org/officeDocument/2006/math" xmlns:a14="http://schemas.microsoft.com/office/drawing/2010/main" xmlns:ma14="http://schemas.microsoft.com/office/mac/drawingml/2011/main" val="1"/>
+              <ma14:wrappingTextBoxFlag xmlns:ma14="http://schemas.microsoft.com/office/mac/drawingml/2011/main" xmlns:a14="http://schemas.microsoft.com/office/drawing/2010/main" xmlns:m="http://schemas.openxmlformats.org/officeDocument/2006/math" xmlns="" val="1"/>
             </a:ext>
           </a:extLst>
         </p:spPr>
@@ -11776,7 +11771,7 @@
             <a:effectLst/>
             <a:extLst>
               <a:ext uri="{C572A759-6A51-4108-AA02-DFA0A04FC94B}">
-                <ma14:wrappingTextBoxFlag xmlns="" xmlns:m="http://schemas.openxmlformats.org/officeDocument/2006/math" xmlns:a14="http://schemas.microsoft.com/office/drawing/2010/main" xmlns:ma14="http://schemas.microsoft.com/office/mac/drawingml/2011/main" val="1"/>
+                <ma14:wrappingTextBoxFlag xmlns:ma14="http://schemas.microsoft.com/office/mac/drawingml/2011/main" xmlns:a14="http://schemas.microsoft.com/office/drawing/2010/main" xmlns:m="http://schemas.openxmlformats.org/officeDocument/2006/math" xmlns="" val="1"/>
               </a:ext>
             </a:extLst>
           </p:spPr>
